--- a/it/slides/12-Architettura_dei_Calcolatori-Verm1_Parte_2-Codice.pptx
+++ b/it/slides/12-Architettura_dei_Calcolatori-Verm1_Parte_2-Codice.pptx
@@ -131,23 +131,35 @@
   <p:extLst>
     <p:ext uri="{521415D9-36F7-43E2-AB2F-B90AF26B5E84}">
       <p14:sectionLst xmlns:p14="http://schemas.microsoft.com/office/powerpoint/2010/main">
-        <p14:section name="Apertura" id="{6b40d9cc-9505-1b62-2128-8ae8aac4638a}">
+        <p14:section name="Apertura" id="{dfa55fc3-66cb-2f9c-0519-3fecd9253b65}">
           <p14:sldIdLst>
             <p14:sldId id="256"/>
             <p14:sldId id="257"/>
           </p14:sldIdLst>
         </p14:section>
-        <p14:section name="I listati" id="{67c201ba-9c08-b543-729f-70cf4de5241d}">
+        <p14:section name="I listati" id="{bf27372b-fe96-8f7a-5dc8-61a732fadc12}">
           <p14:sldIdLst>
             <p14:sldId id="258"/>
+          </p14:sldIdLst>
+        </p14:section>
+        <p14:section name="Passo 1: nomi per i bit" id="{19aa7f0a-5093-b31a-8d78-ff2d050a8140}">
+          <p14:sldIdLst>
             <p14:sldId id="259"/>
             <p14:sldId id="260"/>
+          </p14:sldIdLst>
+        </p14:section>
+        <p14:section name="Passo 2: la guida" id="{7edf7030-11f5-b2e9-af56-7882f1a23b72}">
+          <p14:sldIdLst>
             <p14:sldId id="261"/>
             <p14:sldId id="262"/>
             <p14:sldId id="263"/>
             <p14:sldId id="264"/>
             <p14:sldId id="265"/>
             <p14:sldId id="266"/>
+          </p14:sldIdLst>
+        </p14:section>
+        <p14:section name="Passo 3: il cibo, un punteggio, un suono" id="{92755eab-3296-cefa-3baf-cf6ddc32c007}">
+          <p14:sldIdLst>
             <p14:sldId id="267"/>
             <p14:sldId id="268"/>
             <p14:sldId id="269"/>
@@ -158,7 +170,7 @@
             <p14:sldId id="274"/>
           </p14:sldIdLst>
         </p14:section>
-        <p14:section name="Eseguire e provare" id="{7e7a19b6-6d8b-9634-9cad-94b999908fbf}">
+        <p14:section name="Eseguire e provare" id="{00da36d8-c0c7-ba64-6128-9f223cdd5774}">
           <p14:sldIdLst>
             <p14:sldId id="275"/>
             <p14:sldId id="276"/>
@@ -167,7 +179,7 @@
             <p14:sldId id="279"/>
           </p14:sldIdLst>
         </p14:section>
-        <p14:section name="Esercizi" id="{7250cdad-9db0-69db-5a71-c05d89c680dc}">
+        <p14:section name="Esercizi" id="{a01b4768-46ec-db60-ee75-51c1ab9804b5}">
           <p14:sldIdLst>
             <p14:sldId id="280"/>
           </p14:sldIdLst>
@@ -2266,7 +2278,7 @@
           <a:p>
             <a:r>
               <a:rPr lang="en-US" dirty="0"/>
-              <a:t>Aggiungete queste righe alle costanti della Parte 1. RED è il colore del cibo. Le quattro costanti BTN_ sono maschere: ognuna ha un solo bit a 1, il bit di quel pulsante nella parola restituita dal runtime. Le quattro costanti DIR_ sono i codici delle direzioni, numeri da 0 a 3, cioè due bit. I commenti dicono che cosa significa ciascuno dei due bit, e la slide successiva spiega perché i codici sono stati scelti così.
+              <a:t>Aggiungete queste righe alle costanti della Parte 1. RED è il colore del cibo. Le quattro costanti BTN_ sono maschere: ognuna ha un solo bit a 1, il bit di quel pulsante nella parola restituita dal runtime. Le quattro costanti DIR_ sono i codici delle direzioni, numeri da 0 a 3, cioè due bit. I commenti dicono che cosa significa ciascuno dei due bit, e la presentazione della lezione, nella slide «Un codice scelto con cura», spiega perché i codici sono stati scelti così.
 Per il docente: Aggiungete alle costanti della Parte 1 la riga di RED e quelle da BTN_LEFT a DIR_UP.</a:t>
             </a:r>
             <a:endParaRPr lang="en-US" dirty="0"/>
@@ -3725,7 +3737,63 @@
       </p:sp>
       <p:sp>
         <p:nvSpPr>
-          <p:cNvPr id="12" name="Shape 10"/>
+          <p:cNvPr id="12" name="Text 10"/>
+          <p:cNvSpPr txBox="1"/>
+          <p:nvPr/>
+        </p:nvSpPr>
+        <p:spPr>
+          <a:xfrm>
+            <a:off x="4693615" y="566928"/>
+            <a:ext cx="6949440" cy="640080"/>
+          </a:xfrm>
+          <a:prstGeom prst="rect">
+            <a:avLst/>
+          </a:prstGeom>
+          <a:noFill/>
+          <a:ln/>
+        </p:spPr>
+        <p:txBody>
+          <a:bodyPr wrap="square" lIns="0" tIns="0" rIns="0" bIns="0" rtlCol="0" anchor="t"/>
+          <a:lstStyle/>
+          <a:p>
+            <a:pPr algn="r" indent="0" marL="0">
+              <a:buNone/>
+            </a:pPr>
+            <a:r>
+              <a:rPr lang="en-US" sz="1300" dirty="0">
+                <a:solidFill>
+                  <a:srgbClr val="CFE3EA"/>
+                </a:solidFill>
+                <a:latin typeface="Calibri" pitchFamily="34" charset="0"/>
+                <a:ea typeface="Calibri" pitchFamily="34" charset="-122"/>
+                <a:cs typeface="Calibri" pitchFamily="34" charset="-120"/>
+              </a:rPr>
+              <a:t>Presentazione del codice. I concetti, le figure e le domande sono nella presentazione della lezione:</a:t>
+            </a:r>
+            <a:endParaRPr lang="en-US" sz="1300" dirty="0"/>
+          </a:p>
+          <a:p>
+            <a:pPr algn="r" indent="0" marL="0">
+              <a:buNone/>
+            </a:pPr>
+            <a:r>
+              <a:rPr lang="en-US" sz="1300" dirty="0">
+                <a:solidFill>
+                  <a:srgbClr val="CFE3EA"/>
+                </a:solidFill>
+                <a:latin typeface="Calibri" pitchFamily="34" charset="0"/>
+                <a:ea typeface="Calibri" pitchFamily="34" charset="-122"/>
+                <a:cs typeface="Calibri" pitchFamily="34" charset="-120"/>
+              </a:rPr>
+              <a:t>12-Architettura_dei_Calcolatori-Verm1_Parte_2.pptx</a:t>
+            </a:r>
+            <a:endParaRPr lang="en-US" sz="1300" dirty="0"/>
+          </a:p>
+        </p:txBody>
+      </p:sp>
+      <p:sp>
+        <p:nvSpPr>
+          <p:cNvPr id="13" name="Shape 11"/>
           <p:cNvSpPr/>
           <p:nvPr/>
         </p:nvSpPr>
@@ -3752,7 +3820,7 @@
       </p:sp>
       <p:pic>
         <p:nvPicPr>
-          <p:cNvPr id="13" name="Image 0" descr="/Users/raffaelemontella/devel/riscv-prg32/computer-architecture-with-prg32/tools/assets/verm1_p2.png">    </p:cNvPr>
+          <p:cNvPr id="14" name="Image 0" descr="/Users/raffaelemontella/devel/riscv-prg32/computer-architecture-with-prg32/tools/assets/verm1_p2.png">    </p:cNvPr>
           <p:cNvPicPr>
             <a:picLocks noChangeAspect="1"/>
           </p:cNvPicPr>
@@ -18183,7 +18251,7 @@
                 <a:ea typeface="Calibri" pitchFamily="34" charset="-122"/>
                 <a:cs typeface="Calibri" pitchFamily="34" charset="-120"/>
               </a:rPr>
-              <a:t>I codici non sono arbitrari: si veda la slide successiva</a:t>
+              <a:t>I codici non sono arbitrari: si veda la lezione</a:t>
             </a:r>
             <a:endParaRPr lang="en-US" sz="1200" dirty="0"/>
           </a:p>

--- a/it/slides/12-Architettura_dei_Calcolatori-Verm1_Parte_2-Codice.pptx
+++ b/it/slides/12-Architettura_dei_Calcolatori-Verm1_Parte_2-Codice.pptx
@@ -131,24 +131,24 @@
   <p:extLst>
     <p:ext uri="{521415D9-36F7-43E2-AB2F-B90AF26B5E84}">
       <p14:sectionLst xmlns:p14="http://schemas.microsoft.com/office/powerpoint/2010/main">
-        <p14:section name="Apertura" id="{dfa55fc3-66cb-2f9c-0519-3fecd9253b65}">
+        <p14:section name="Apertura" id="{4c2209d7-1b81-9502-087c-1c4df962fda9}">
           <p14:sldIdLst>
             <p14:sldId id="256"/>
             <p14:sldId id="257"/>
           </p14:sldIdLst>
         </p14:section>
-        <p14:section name="I listati" id="{bf27372b-fe96-8f7a-5dc8-61a732fadc12}">
+        <p14:section name="I listati" id="{91d9bad8-551c-4289-cb46-d1beac12b9d4}">
           <p14:sldIdLst>
             <p14:sldId id="258"/>
           </p14:sldIdLst>
         </p14:section>
-        <p14:section name="Passo 1: nomi per i bit" id="{19aa7f0a-5093-b31a-8d78-ff2d050a8140}">
+        <p14:section name="Passo 1: nomi per i bit" id="{a65f0b10-5fcf-5803-af83-cc5bf3a44539}">
           <p14:sldIdLst>
             <p14:sldId id="259"/>
             <p14:sldId id="260"/>
           </p14:sldIdLst>
         </p14:section>
-        <p14:section name="Passo 2: la guida" id="{7edf7030-11f5-b2e9-af56-7882f1a23b72}">
+        <p14:section name="Passo 2: la guida" id="{5fe01658-a7b2-cd22-1970-29d8dbda862c}">
           <p14:sldIdLst>
             <p14:sldId id="261"/>
             <p14:sldId id="262"/>
@@ -158,7 +158,7 @@
             <p14:sldId id="266"/>
           </p14:sldIdLst>
         </p14:section>
-        <p14:section name="Passo 3: il cibo, un punteggio, un suono" id="{92755eab-3296-cefa-3baf-cf6ddc32c007}">
+        <p14:section name="Passo 3: il cibo, un punteggio, un suono" id="{8a8127a7-c311-306b-033e-997c9470b0b4}">
           <p14:sldIdLst>
             <p14:sldId id="267"/>
             <p14:sldId id="268"/>
@@ -170,7 +170,7 @@
             <p14:sldId id="274"/>
           </p14:sldIdLst>
         </p14:section>
-        <p14:section name="Eseguire e provare" id="{00da36d8-c0c7-ba64-6128-9f223cdd5774}">
+        <p14:section name="Eseguire e provare" id="{d350eef5-c4e2-80f0-0369-bad5d6fb79e8}">
           <p14:sldIdLst>
             <p14:sldId id="275"/>
             <p14:sldId id="276"/>
@@ -179,7 +179,7 @@
             <p14:sldId id="279"/>
           </p14:sldIdLst>
         </p14:section>
-        <p14:section name="Esercizi" id="{a01b4768-46ec-db60-ee75-51c1ab9804b5}">
+        <p14:section name="Esercizi" id="{6c4189b2-ba38-ee9c-4288-020a33bfd408}">
           <p14:sldIdLst>
             <p14:sldId id="280"/>
           </p14:sldIdLst>
@@ -588,7 +588,9 @@
           <a:p>
             <a:r>
               <a:rPr lang="en-US" dirty="0"/>
-              <a:t>Questa è la presentazione del codice della Lezione 12. La presentazione della lezione contiene i concetti; questa contiene tutto ciò che si scrive e si esegue: i listati con la loro spiegazione, il programma completo, che cosa mostra, e il modo di provarlo su ciascuno dei tre host.</a:t>
+              <a:t>Questa è la presentazione del codice della Lezione 12. La presentazione della lezione contiene i concetti; questa contiene tutto ciò che si scrive e si esegue: i listati con la loro spiegazione, il programma completo, che cosa mostra, e il modo di provarlo su ciascuno dei tre host.
+Stato di apprendimento: DA COMPRENDERE OGGI, alla fine di questa lezione lo spiegate, lo seguite passo passo e lo applicate da soli; DA UTILIZZARE OGGI, oggi seguite e usate la ricetta; come funziona dentro si spiega più avanti, o non fa parte del corso; DA COMPRENDERE PIÙ AVANTI, riconoscete il nome e lo scopo; lo spiega una lezione successiva. Una slide senza etichetta è contesto: una storia, un esempio, una domanda, un esercizio.
+Stato di apprendimento di questa lezione. DA COMPRENDERE OGGI: le maschere di bit; i codici; gli array in memoria; gli ingressi con pull-up; l'algebra di Boole; la virgola fissa; i multiplexer; istruzioni con o senza segno; comparatori e parità; gli argomenti in a0 ... a7. DA UTILIZZARE OGGI: la convenzione di chiamata (Lezione 18) e, usati senza essere studiati nel corso, gli strumenti di PRG32, le chiamate del runtime PRG32, il debugger di PRG32-QT. DA COMPRENDERE PIÙ AVANTI: niente. Una slide senza etichetta è contesto: una storia, un esempio, una domanda, un esercizio.</a:t>
             </a:r>
             <a:endParaRPr lang="en-US" dirty="0"/>
           </a:p>
@@ -944,6 +946,7 @@
             <a:r>
               <a:rPr lang="en-US" dirty="0"/>
               <a:t>place_food chiede al runtime due numeri casuali. Il contratto di prg32_random_number è: minimo in a0, massimo in a1, estremi compresi, risultato in a0. La prima chiamata dà una colonna da 0 a 39, la seconda una riga da 0 a 23, e ciascuna viene memorizzata nella propria variabile. Un difetto è lasciato di proposito: il cibo può cadere esattamente sulla testa. Lo correggerà la Parte 3, quando il verme avrà un corpo.
+DA UTILIZZARE OGGI: le chiamate del runtime PRG32 (si usa, non si studia, in questo corso).
 Per il docente: I numeri casuali vengono dal runtime: sulla scheda dal generatore hardware dell'ESP32-C6. Due partite sono diverse.</a:t>
             </a:r>
             <a:endParaRPr lang="en-US" dirty="0"/>
@@ -1033,6 +1036,7 @@
             <a:r>
               <a:rPr lang="en-US" dirty="0"/>
               <a:t>Sostituisce il finale provvisorio di step. È un comparatore costruito con le istruzioni: lo xor della colonna del cibo e di quella della testa vale 0 quando sono uguali; lo stesso per le righe; l'or dei due risultati vale 0 solo se entrambe sono uguali. Se il risultato non è zero, la funzione finisce. Altrimenti il verme ha mangiato: il punteggio aumenta di uno, si piazza nuovo cibo, e si suona una nota. È l'AND di XNOR della Lezione 11, scritto con due xor e una or.
+DA COMPRENDERE OGGI: comparatori e parità.
 Per il docente: Un comparatore di uguaglianza è una fila di porte XOR seguita da un OR: Lezione 11. Qui sono due xor e una or. I registri t4 e t6 contengono ancora la nuova colonna e la nuova riga; dopo le chiamate non servono più, ed è per questo che si possono tenere in registri temporanei.</a:t>
             </a:r>
             <a:endParaRPr lang="en-US" dirty="0"/>
@@ -1122,6 +1126,7 @@
             <a:r>
               <a:rPr lang="en-US" dirty="0"/>
               <a:t>eat_sound suona una nota. prg32_audio_note prende cinque argomenti, da a0 ad a4: canale, strumento, nota, volume e durata in millisecondi. La nota 72 è il Do della quinta ottava nella numerazione MIDI. L'ultima nota ripete un principio di PRG32: il suono viene per ultimo. Il gioco funzionava anche senza, e lo si aggiunge quando tutto il resto è solido.
+DA UTILIZZARE OGGI: le chiamate del runtime PRG32 (si usa, non si studia, in questo corso).
 Per il docente: prg32_audio_note(canale, strumento, nota, volume, millisecondi). Su PRG32-QT la nota è suonata dal computer; sulla scheda dall'amplificatore con il suo altoparlante.</a:t>
             </a:r>
             <a:endParaRPr lang="en-US" dirty="0"/>
@@ -1211,6 +1216,7 @@
             <a:r>
               <a:rPr lang="en-US" dirty="0"/>
               <a:t>L'inizio della nuova verm1_draw: dopo il titolo, un ciclo disegna un rettangolino per ogni punto del punteggio, a 4 pixel di distanza. Il contatore del ciclo sta in s0, non in un registro t, perché deve sopravvivere alle chiamate a prg32_gfx_rect: una funzione può distruggere i temporanei, ma conserva i registri s. In cambio la vostra funzione deve salvare s0 nel proprio frame e ripristinarlo alla fine. Questa convenzione si studia nella Lezione 18.
+DA UTILIZZARE OGGI: la convenzione di chiamata (si studia nella Lezione 18).
 Per il docente: Sostituite l'inizio di verm1_draw. Un registro t può essere distrutto da qualunque chiamata; un registro s è conservato, purché lo salviamo e lo ripristiniamo noi: la convenzione, incontrata nella Lezione 02, si studia nella Lezione 18. Le cifre arrivano nella Parte 4, quando è disponibile la divisione.</a:t>
             </a:r>
             <a:endParaRPr lang="en-US" dirty="0"/>
@@ -1300,6 +1306,7 @@
             <a:r>
               <a:rPr lang="en-US" dirty="0"/>
               <a:t>Il resto di verm1_draw: le stesse tre righe due volte, prima per il cibo e poi per la testa: si carica la colonna, si carica la riga, si carica il colore, e si chiama draw_cell. L'ordine conta: la testa si disegna per ultima, così copre il cibo se stanno nella stessa cella. Poi s0 e ra vengono ripristinati e la funzione ritorna.
+DA COMPRENDERE OGGI: gli argomenti in a0 ... a7.
 Per il docente: È il resto di verm1_draw: sostituisce il rettangolo della Parte 1.</a:t>
             </a:r>
             <a:endParaRPr lang="en-US" dirty="0"/>
@@ -1389,6 +1396,7 @@
             <a:r>
               <a:rPr lang="en-US" dirty="0"/>
               <a:t>draw_cell raccoglie in una funzione l'aritmetica che la Parte 1 aveva dentro draw: colonna per 8, riga per 8 più TOP. Il suo contratto è scritto nel commento sulla prima riga: colonna in a0, riga in a1, colore in a2. Una sottigliezza: prg32_gfx_rect vuole il colore in a4, e a2 sta per essere sovrascritto con la larghezza, quindi il colore va spostato per primo. Scrivere in un commento il contratto di una funzione fa parte del lavoro.
+DA COMPRENDERE OGGI: gli argomenti in a0 ... a7.
 Per il docente: Una funzione con un contratto: a0 = colonna, a1 = riga, a2 = colore. Scrivere il contratto in un commento fa parte del lavoro.</a:t>
             </a:r>
             <a:endParaRPr lang="en-US" dirty="0"/>
@@ -1745,6 +1753,7 @@
             <a:r>
               <a:rPr lang="en-US" dirty="0"/>
               <a:t>La via più rapida: PRG32-QT sul vostro computer. Quattro passi, ciascuno con il suo comando. PRG32-QT si comporta come una scheda sulla porta 8080, ed è per questo che il comando di caricamento dice esp32c6. Con la modalità debug abilitata potete fermarvi su qualsiasi istruzione e leggere registri e memoria.
+DA UTILIZZARE OGGI: gli strumenti di PRG32 (si usa, non si studia, in questo corso).
 Per il docente: Eseguito dai test: la cartuccia di questa slide è compilata con questo comando ed eseguita sull'esecutore senza interfaccia di PRG32-QT. Senza la toolchain: importate il file .prg32 in PRG32-QT e scegliete Run Cartridge. Tasti: frecce o WASD per il joystick, Z o J per A, X o K per B, Invio per Start, Esc per tornare a Setup.</a:t>
             </a:r>
             <a:endParaRPr lang="en-US" dirty="0"/>
@@ -1834,6 +1843,7 @@
             <a:r>
               <a:rPr lang="en-US" dirty="0"/>
               <a:t>Lo stesso programma sull'emulatore. QEMU esegue il firmware vero su un chip emulato, quindi la cartuccia va compilata per l'architettura qemu. Caricate la cartuccia mentre QEMU è chiuso. Il firmware si apre sul menu Setup: scegliete Run Cartridge e lo slot. Ricordate che la tastiera è letta dal terminale, non dalla finestra con l'immagine.
+DA UTILIZZARE OGGI: gli strumenti di PRG32 (si usa, non si studia, in questo corso).
 Per il docente: Verificato dai test fino al caricamento: la cartuccia è compilata per l'architettura qemu e accettata nell'immagine flash dell'emulatore. Ciò che l'emulatore poi mostra non è verificato automaticamente: il QEMU di Espressif ha bisogno della sua finestra. Dall'ottobre 2026 il firmware parte da Setup: scegliete Run Cartridge, poi cart0.</a:t>
             </a:r>
             <a:endParaRPr lang="en-US" dirty="0"/>
@@ -1923,6 +1933,7 @@
             <a:r>
               <a:rPr lang="en-US" dirty="0"/>
               <a:t>Lo stesso programma sul kit. Il firmware si scrive una volta, via USB; dopo, le cartucce viaggiano sul Wi-Fi. Il comando di caricamento è quello usato per PRG32-QT con l'indirizzo della scheda. È l'unico host che i test automatici non eseguono: provatelo, e riferite ciò che vedete.
+DA UTILIZZARE OGGI: gli strumenti di PRG32 (si usa, non si studia, in questo corso).
 Per il docente: Non eseguito dai test: sulla macchina di prova non c'è una scheda. La cartuccia per l'architettura esp32c6 è compilata dai test; i passi sono quelli della documentazione di PRG32. Se la porta seriale non viene trovata, passatela esplicitamente. Per usare il Wi-Fi dell'aula: python3 -m prg32 wifi set --ssid NOME --password PASSWORD --mode sta.</a:t>
             </a:r>
             <a:endParaRPr lang="en-US" dirty="0"/>
@@ -2012,6 +2023,7 @@
             <a:r>
               <a:rPr lang="en-US" dirty="0"/>
               <a:t>I cinque sintomi più comuni, che cosa significa ciascuno, e che cosa fare. Leggete il messaggio prima di cambiare qualcosa: quasi sempre nomina la causa.
+DA UTILIZZARE OGGI: gli strumenti di PRG32 (si usa, non si studia, in questo corso).
 Per il docente: Le prime tre righe coprono la maggior parte dei casi. Quando chiedete aiuto, incollate il comando e l'intero messaggio come testo. docs/usage/troubleshooting.md del repository di PRG32 ha l'elenco completo.</a:t>
             </a:r>
             <a:endParaRPr lang="en-US" dirty="0"/>
@@ -2190,6 +2202,7 @@
             <a:r>
               <a:rPr lang="en-US" dirty="0"/>
               <a:t>Gli stessi due comandi della Parte 1: compilare la cartuccia, poi caricarla su PRG32-QT ed eseguirla. Tenete aperto PRG32-QT per tutta la seduta, con la modalità debug attiva se volete il debugger a portata di mano: lo usa il passo 4.
+DA UTILIZZARE OGGI: gli strumenti di PRG32 (si usa, non si studia, in questo corso).
 Per il docente: Gli stessi due comandi della Parte 1. PRG32-QT deve essere in esecuzione, con Run cartridges in RISC-V debug mode attivo in Settings se si vuole il debugger.</a:t>
             </a:r>
             <a:endParaRPr lang="en-US" dirty="0"/>
@@ -2279,6 +2292,7 @@
             <a:r>
               <a:rPr lang="en-US" dirty="0"/>
               <a:t>Aggiungete queste righe alle costanti della Parte 1. RED è il colore del cibo. Le quattro costanti BTN_ sono maschere: ognuna ha un solo bit a 1, il bit di quel pulsante nella parola restituita dal runtime. Le quattro costanti DIR_ sono i codici delle direzioni, numeri da 0 a 3, cioè due bit. I commenti dicono che cosa significa ciascuno dei due bit, e la presentazione della lezione, nella slide «Un codice scelto con cura», spiega perché i codici sono stati scelti così.
+DA COMPRENDERE OGGI: le maschere di bit.
 Per il docente: Aggiungete alle costanti della Parte 1 la riga di RED e quelle da BTN_LEFT a DIR_UP.</a:t>
             </a:r>
             <a:endParaRPr lang="en-US" dirty="0"/>
@@ -2368,6 +2382,7 @@
             <a:r>
               <a:rPr lang="en-US" dirty="0"/>
               <a:t>Sostituite con questi i dati della Parte 1. In .rodata ci sono due tabelle di quattro parole, dx e dy: per ogni codice di direzione, la variazione di colonna e la variazione di riga. Non cambiano mai, quindi stanno con le costanti. In .data ci sono cinque variabili nuove: dir, la direzione dell'ultimo passo; want, la direzione chiesta dal giocatore; e score, food_x e food_y, che si usano nel passo 3.
+DA COMPRENDERE OGGI: gli array in memoria.
 Per il docente: Sostituite con questi i dati della Parte 1. I valori iniziali bastano per il passo 2: init si completa nel passo 3.</a:t>
             </a:r>
             <a:endParaRPr lang="en-US" dirty="0"/>
@@ -2457,6 +2472,7 @@
             <a:r>
               <a:rPr lang="en-US" dirty="0"/>
               <a:t>Sostituisce l'inizio di verm1_update. Dopo la chiamata a prg32_input_read, t1 riceve la direzione corrente e t2 il desiderio corrente. Poi quattro blocchi identici: andi isola un pulsante; se il risultato è zero si salta l'istruzione successiva; altrimenti il desiderio in t2 viene sovrascritto con quella direzione. Infine la regola: lo XOR di desiderio e direzione si confronta con 2; se sono uguali la richiesta è un'inversione a U e la sw viene saltata, così resta il desiderio precedente. update ora fa una chiamata, quindi ha un frame di stack.
+DA COMPRENDERE OGGI: le maschere di bit.
 Per il docente: Sostituisce l'inizio di verm1_update. update ora chiama una funzione, quindi le serve un frame di stack. Con due pulsanti premuti vince l'ultimo test: UP batte LEFT che batte DOWN che batte RIGHT. Il desiderio del giocatore è memorizzato in want e diventa la direzione solo al passo successivo: così due pressioni rapide non possono ripiegare il verme su se stesso.</a:t>
             </a:r>
             <a:endParaRPr lang="en-US" dirty="0"/>
@@ -2546,6 +2562,7 @@
             <a:r>
               <a:rPr lang="en-US" dirty="0"/>
               <a:t>Il resto di verm1_update è il timer in virgola fissa della Parte 1, invariato: si somma la velocità, e quando si è accumulata una cella intera si sottrae 256. L'unica differenza è ciò che accade dopo: invece di muovere direttamente head_x, il codice chiama una funzione nuova, step. Qui le etichette locali sono 6 e 7 perché i numeri da 1 a 5 sono già usati nella prima metà della funzione.
+DA COMPRENDERE OGGI: la virgola fissa.
 Per il docente: È il resto di verm1_update. Le righe che nella Parte 1 muovevano head_x sono sparite: diventano la funzione step.</a:t>
             </a:r>
             <a:endParaRPr lang="en-US" dirty="0"/>
@@ -2635,6 +2652,7 @@
             <a:r>
               <a:rPr lang="en-US" dirty="0"/>
               <a:t>La prima metà di step. Il desiderio diventa la direzione: accade una volta per passo, non una volta per frame, così due pressioni rapide non possono ripiegare il verme su se stesso. Poi la ricerca in tabella: il codice della direzione viene scorso a sinistra di 2, perché ogni elemento di una tabella è una parola di quattro byte, e sommato all'indirizzo di dx; la parola caricata è la variazione di colonna, meno 1, 0 o più 1. Lo stesso scostamento serve per dy. Non c'è alcun salto: il codice seleziona il valore, come farebbe un multiplexer.
+DA COMPRENDERE OGGI: i multiplexer.
 Per il docente: Una tabella in memoria di sola lettura indirizzata da un codice è una ROM: Lezione 11. L'alternativa sono quattro salti; la tabella è più corta, e cambiare le regole significa cambiare dati, non codice.</a:t>
             </a:r>
             <a:endParaRPr lang="en-US" dirty="0"/>
@@ -2724,6 +2742,7 @@
             <a:r>
               <a:rPr lang="en-US" dirty="0"/>
               <a:t>La seconda metà muove la testa e gestisce i bordi, nei due versi. La colonna più dx ora può diventare meno 1: bgez esamina il segno, e una colonna negativa è sostituita dall'ultima colonna. Se invece ha raggiunto COLS, diventa 0. Lo stesso si fa per la riga con ROWS. Notate l'ultima nota: t4 e t6 contengono ancora la nuova colonna e la nuova riga, e il pezzo di codice successivo li userà.
+DA COMPRENDERE OGGI: istruzioni con o senza segno.
 Per il docente: Nella Parte 1 esisteva solo il bordo destro. Una colonna negativa è un numero con segno: bgez e blt sono i confronti con segno della Lezione 05.</a:t>
             </a:r>
             <a:endParaRPr lang="en-US" dirty="0"/>
@@ -3844,6 +3863,420 @@
       </p:pic>
       <p:sp>
         <p:nvSpPr>
+          <p:cNvPr id="15" name="Shape 12"/>
+          <p:cNvSpPr/>
+          <p:nvPr/>
+        </p:nvSpPr>
+        <p:spPr>
+          <a:xfrm>
+            <a:off x="8910777" y="91440"/>
+            <a:ext cx="2732278" cy="274320"/>
+          </a:xfrm>
+          <a:prstGeom prst="rect">
+            <a:avLst/>
+          </a:prstGeom>
+          <a:solidFill>
+            <a:srgbClr val="F3E8FF"/>
+          </a:solidFill>
+          <a:ln w="12700">
+            <a:solidFill>
+              <a:srgbClr val="7E22CE"/>
+            </a:solidFill>
+            <a:prstDash val="dash"/>
+          </a:ln>
+        </p:spPr>
+      </p:sp>
+      <p:sp>
+        <p:nvSpPr>
+          <p:cNvPr id="16" name="Shape 13"/>
+          <p:cNvSpPr/>
+          <p:nvPr/>
+        </p:nvSpPr>
+        <p:spPr>
+          <a:xfrm>
+            <a:off x="8938209" y="128016"/>
+            <a:ext cx="45720" cy="45720"/>
+          </a:xfrm>
+          <a:prstGeom prst="rect">
+            <a:avLst/>
+          </a:prstGeom>
+          <a:solidFill>
+            <a:srgbClr val="7E22CE"/>
+          </a:solidFill>
+          <a:ln w="12700">
+            <a:solidFill>
+              <a:srgbClr val="7E22CE"/>
+            </a:solidFill>
+            <a:prstDash val="solid"/>
+          </a:ln>
+        </p:spPr>
+      </p:sp>
+      <p:sp>
+        <p:nvSpPr>
+          <p:cNvPr id="17" name="Shape 14"/>
+          <p:cNvSpPr/>
+          <p:nvPr/>
+        </p:nvSpPr>
+        <p:spPr>
+          <a:xfrm>
+            <a:off x="8938209" y="205740"/>
+            <a:ext cx="45720" cy="45720"/>
+          </a:xfrm>
+          <a:prstGeom prst="rect">
+            <a:avLst/>
+          </a:prstGeom>
+          <a:solidFill>
+            <a:srgbClr val="7E22CE"/>
+          </a:solidFill>
+          <a:ln w="12700">
+            <a:solidFill>
+              <a:srgbClr val="7E22CE"/>
+            </a:solidFill>
+            <a:prstDash val="solid"/>
+          </a:ln>
+        </p:spPr>
+      </p:sp>
+      <p:sp>
+        <p:nvSpPr>
+          <p:cNvPr id="18" name="Shape 15"/>
+          <p:cNvSpPr/>
+          <p:nvPr/>
+        </p:nvSpPr>
+        <p:spPr>
+          <a:xfrm>
+            <a:off x="8938209" y="283464"/>
+            <a:ext cx="45720" cy="45720"/>
+          </a:xfrm>
+          <a:prstGeom prst="rect">
+            <a:avLst/>
+          </a:prstGeom>
+          <a:solidFill>
+            <a:srgbClr val="7E22CE"/>
+          </a:solidFill>
+          <a:ln w="12700">
+            <a:solidFill>
+              <a:srgbClr val="7E22CE"/>
+            </a:solidFill>
+            <a:prstDash val="solid"/>
+          </a:ln>
+        </p:spPr>
+      </p:sp>
+      <p:pic>
+        <p:nvPicPr>
+          <p:cNvPr id="19" name="Image 1" descr="preencoded.png">    </p:cNvPr>
+          <p:cNvPicPr>
+            <a:picLocks noChangeAspect="1"/>
+          </p:cNvPicPr>
+          <p:nvPr/>
+        </p:nvPicPr>
+        <p:blipFill>
+          <a:blip r:embed="rId2"/>
+          <a:stretch>
+            <a:fillRect/>
+          </a:stretch>
+        </p:blipFill>
+        <p:spPr>
+          <a:xfrm>
+            <a:off x="9038793" y="128016"/>
+            <a:ext cx="201168" cy="201168"/>
+          </a:xfrm>
+          <a:prstGeom prst="rect">
+            <a:avLst/>
+          </a:prstGeom>
+        </p:spPr>
+      </p:pic>
+      <p:sp>
+        <p:nvSpPr>
+          <p:cNvPr id="20" name="Text 16"/>
+          <p:cNvSpPr txBox="1"/>
+          <p:nvPr/>
+        </p:nvSpPr>
+        <p:spPr>
+          <a:xfrm>
+            <a:off x="9294825" y="91440"/>
+            <a:ext cx="2311654" cy="274320"/>
+          </a:xfrm>
+          <a:prstGeom prst="rect">
+            <a:avLst/>
+          </a:prstGeom>
+          <a:noFill/>
+          <a:ln/>
+        </p:spPr>
+        <p:txBody>
+          <a:bodyPr wrap="square" lIns="0" tIns="0" rIns="0" bIns="0" rtlCol="0" anchor="ctr"/>
+          <a:lstStyle/>
+          <a:p>
+            <a:pPr indent="0" marL="0">
+              <a:buNone/>
+            </a:pPr>
+            <a:r>
+              <a:rPr lang="en-US" sz="1100" b="1" dirty="0">
+                <a:solidFill>
+                  <a:srgbClr val="6B21A8"/>
+                </a:solidFill>
+                <a:latin typeface="Calibri" pitchFamily="34" charset="0"/>
+                <a:ea typeface="Calibri" pitchFamily="34" charset="-122"/>
+                <a:cs typeface="Calibri" pitchFamily="34" charset="-120"/>
+              </a:rPr>
+              <a:t>DA COMPRENDERE PIÙ AVANTI</a:t>
+            </a:r>
+            <a:endParaRPr lang="en-US" sz="1100" dirty="0"/>
+          </a:p>
+        </p:txBody>
+      </p:sp>
+      <p:sp>
+        <p:nvSpPr>
+          <p:cNvPr id="21" name="Shape 17"/>
+          <p:cNvSpPr/>
+          <p:nvPr/>
+        </p:nvSpPr>
+        <p:spPr>
+          <a:xfrm>
+            <a:off x="6675069" y="91440"/>
+            <a:ext cx="2125980" cy="274320"/>
+          </a:xfrm>
+          <a:prstGeom prst="rect">
+            <a:avLst/>
+          </a:prstGeom>
+          <a:solidFill>
+            <a:srgbClr val="FEF3C7"/>
+          </a:solidFill>
+          <a:ln w="12700">
+            <a:solidFill>
+              <a:srgbClr val="B45309"/>
+            </a:solidFill>
+            <a:prstDash val="solid"/>
+          </a:ln>
+        </p:spPr>
+      </p:sp>
+      <p:sp>
+        <p:nvSpPr>
+          <p:cNvPr id="22" name="Shape 18"/>
+          <p:cNvSpPr/>
+          <p:nvPr/>
+        </p:nvSpPr>
+        <p:spPr>
+          <a:xfrm>
+            <a:off x="6675069" y="91440"/>
+            <a:ext cx="27432" cy="274320"/>
+          </a:xfrm>
+          <a:prstGeom prst="rect">
+            <a:avLst/>
+          </a:prstGeom>
+          <a:solidFill>
+            <a:srgbClr val="B45309"/>
+          </a:solidFill>
+          <a:ln w="12700">
+            <a:solidFill>
+              <a:srgbClr val="B45309"/>
+            </a:solidFill>
+            <a:prstDash val="solid"/>
+          </a:ln>
+        </p:spPr>
+      </p:sp>
+      <p:sp>
+        <p:nvSpPr>
+          <p:cNvPr id="23" name="Shape 19"/>
+          <p:cNvSpPr/>
+          <p:nvPr/>
+        </p:nvSpPr>
+        <p:spPr>
+          <a:xfrm>
+            <a:off x="6729933" y="91440"/>
+            <a:ext cx="27432" cy="274320"/>
+          </a:xfrm>
+          <a:prstGeom prst="rect">
+            <a:avLst/>
+          </a:prstGeom>
+          <a:solidFill>
+            <a:srgbClr val="B45309"/>
+          </a:solidFill>
+          <a:ln w="12700">
+            <a:solidFill>
+              <a:srgbClr val="B45309"/>
+            </a:solidFill>
+            <a:prstDash val="solid"/>
+          </a:ln>
+        </p:spPr>
+      </p:sp>
+      <p:pic>
+        <p:nvPicPr>
+          <p:cNvPr id="24" name="Image 2" descr="preencoded.png">    </p:cNvPr>
+          <p:cNvPicPr>
+            <a:picLocks noChangeAspect="1"/>
+          </p:cNvPicPr>
+          <p:nvPr/>
+        </p:nvPicPr>
+        <p:blipFill>
+          <a:blip r:embed="rId3"/>
+          <a:stretch>
+            <a:fillRect/>
+          </a:stretch>
+        </p:blipFill>
+        <p:spPr>
+          <a:xfrm>
+            <a:off x="6803085" y="128016"/>
+            <a:ext cx="201168" cy="201168"/>
+          </a:xfrm>
+          <a:prstGeom prst="rect">
+            <a:avLst/>
+          </a:prstGeom>
+        </p:spPr>
+      </p:pic>
+      <p:sp>
+        <p:nvSpPr>
+          <p:cNvPr id="25" name="Text 20"/>
+          <p:cNvSpPr txBox="1"/>
+          <p:nvPr/>
+        </p:nvSpPr>
+        <p:spPr>
+          <a:xfrm>
+            <a:off x="7059117" y="91440"/>
+            <a:ext cx="1705356" cy="274320"/>
+          </a:xfrm>
+          <a:prstGeom prst="rect">
+            <a:avLst/>
+          </a:prstGeom>
+          <a:noFill/>
+          <a:ln/>
+        </p:spPr>
+        <p:txBody>
+          <a:bodyPr wrap="square" lIns="0" tIns="0" rIns="0" bIns="0" rtlCol="0" anchor="ctr"/>
+          <a:lstStyle/>
+          <a:p>
+            <a:pPr indent="0" marL="0">
+              <a:buNone/>
+            </a:pPr>
+            <a:r>
+              <a:rPr lang="en-US" sz="1100" b="1" dirty="0">
+                <a:solidFill>
+                  <a:srgbClr val="92400E"/>
+                </a:solidFill>
+                <a:latin typeface="Calibri" pitchFamily="34" charset="0"/>
+                <a:ea typeface="Calibri" pitchFamily="34" charset="-122"/>
+                <a:cs typeface="Calibri" pitchFamily="34" charset="-120"/>
+              </a:rPr>
+              <a:t>DA UTILIZZARE OGGI</a:t>
+            </a:r>
+            <a:endParaRPr lang="en-US" sz="1100" dirty="0"/>
+          </a:p>
+        </p:txBody>
+      </p:sp>
+      <p:sp>
+        <p:nvSpPr>
+          <p:cNvPr id="26" name="Shape 21"/>
+          <p:cNvSpPr/>
+          <p:nvPr/>
+        </p:nvSpPr>
+        <p:spPr>
+          <a:xfrm>
+            <a:off x="4352747" y="91440"/>
+            <a:ext cx="2212594" cy="274320"/>
+          </a:xfrm>
+          <a:prstGeom prst="rect">
+            <a:avLst/>
+          </a:prstGeom>
+          <a:solidFill>
+            <a:srgbClr val="E0F2FE"/>
+          </a:solidFill>
+          <a:ln w="12700">
+            <a:solidFill>
+              <a:srgbClr val="0369A1"/>
+            </a:solidFill>
+            <a:prstDash val="solid"/>
+          </a:ln>
+        </p:spPr>
+      </p:sp>
+      <p:sp>
+        <p:nvSpPr>
+          <p:cNvPr id="27" name="Shape 22"/>
+          <p:cNvSpPr/>
+          <p:nvPr/>
+        </p:nvSpPr>
+        <p:spPr>
+          <a:xfrm>
+            <a:off x="4352747" y="91440"/>
+            <a:ext cx="73152" cy="274320"/>
+          </a:xfrm>
+          <a:prstGeom prst="rect">
+            <a:avLst/>
+          </a:prstGeom>
+          <a:solidFill>
+            <a:srgbClr val="0369A1"/>
+          </a:solidFill>
+          <a:ln w="12700">
+            <a:solidFill>
+              <a:srgbClr val="0369A1"/>
+            </a:solidFill>
+            <a:prstDash val="solid"/>
+          </a:ln>
+        </p:spPr>
+      </p:sp>
+      <p:pic>
+        <p:nvPicPr>
+          <p:cNvPr id="28" name="Image 3" descr="preencoded.png">    </p:cNvPr>
+          <p:cNvPicPr>
+            <a:picLocks noChangeAspect="1"/>
+          </p:cNvPicPr>
+          <p:nvPr/>
+        </p:nvPicPr>
+        <p:blipFill>
+          <a:blip r:embed="rId4"/>
+          <a:stretch>
+            <a:fillRect/>
+          </a:stretch>
+        </p:blipFill>
+        <p:spPr>
+          <a:xfrm>
+            <a:off x="4480763" y="128016"/>
+            <a:ext cx="201168" cy="201168"/>
+          </a:xfrm>
+          <a:prstGeom prst="rect">
+            <a:avLst/>
+          </a:prstGeom>
+        </p:spPr>
+      </p:pic>
+      <p:sp>
+        <p:nvSpPr>
+          <p:cNvPr id="29" name="Text 23"/>
+          <p:cNvSpPr txBox="1"/>
+          <p:nvPr/>
+        </p:nvSpPr>
+        <p:spPr>
+          <a:xfrm>
+            <a:off x="4736795" y="91440"/>
+            <a:ext cx="1791970" cy="274320"/>
+          </a:xfrm>
+          <a:prstGeom prst="rect">
+            <a:avLst/>
+          </a:prstGeom>
+          <a:noFill/>
+          <a:ln/>
+        </p:spPr>
+        <p:txBody>
+          <a:bodyPr wrap="square" lIns="0" tIns="0" rIns="0" bIns="0" rtlCol="0" anchor="ctr"/>
+          <a:lstStyle/>
+          <a:p>
+            <a:pPr indent="0" marL="0">
+              <a:buNone/>
+            </a:pPr>
+            <a:r>
+              <a:rPr lang="en-US" sz="1100" b="1" dirty="0">
+                <a:solidFill>
+                  <a:srgbClr val="075985"/>
+                </a:solidFill>
+                <a:latin typeface="Calibri" pitchFamily="34" charset="0"/>
+                <a:ea typeface="Calibri" pitchFamily="34" charset="-122"/>
+                <a:cs typeface="Calibri" pitchFamily="34" charset="-120"/>
+              </a:rPr>
+              <a:t>DA COMPRENDERE OGGI</a:t>
+            </a:r>
+            <a:endParaRPr lang="en-US" sz="1100" dirty="0"/>
+          </a:p>
+        </p:txBody>
+      </p:sp>
+      <p:sp>
+        <p:nvSpPr>
           <p:cNvPr id="25" name="Slide Number Placeholder 0"/>
           <p:cNvSpPr>
             <a:spLocks noGrp="1"/>
@@ -6835,6 +7268,158 @@
       </p:sp>
       <p:sp>
         <p:nvSpPr>
+          <p:cNvPr id="17" name="Shape 15"/>
+          <p:cNvSpPr/>
+          <p:nvPr/>
+        </p:nvSpPr>
+        <p:spPr>
+          <a:xfrm>
+            <a:off x="7415987" y="91440"/>
+            <a:ext cx="4227068" cy="274320"/>
+          </a:xfrm>
+          <a:prstGeom prst="rect">
+            <a:avLst/>
+          </a:prstGeom>
+          <a:solidFill>
+            <a:srgbClr val="FEF3C7"/>
+          </a:solidFill>
+          <a:ln w="12700">
+            <a:solidFill>
+              <a:srgbClr val="B45309"/>
+            </a:solidFill>
+            <a:prstDash val="solid"/>
+          </a:ln>
+        </p:spPr>
+      </p:sp>
+      <p:sp>
+        <p:nvSpPr>
+          <p:cNvPr id="18" name="Shape 16"/>
+          <p:cNvSpPr/>
+          <p:nvPr/>
+        </p:nvSpPr>
+        <p:spPr>
+          <a:xfrm>
+            <a:off x="7415987" y="91440"/>
+            <a:ext cx="27432" cy="274320"/>
+          </a:xfrm>
+          <a:prstGeom prst="rect">
+            <a:avLst/>
+          </a:prstGeom>
+          <a:solidFill>
+            <a:srgbClr val="B45309"/>
+          </a:solidFill>
+          <a:ln w="12700">
+            <a:solidFill>
+              <a:srgbClr val="B45309"/>
+            </a:solidFill>
+            <a:prstDash val="solid"/>
+          </a:ln>
+        </p:spPr>
+      </p:sp>
+      <p:sp>
+        <p:nvSpPr>
+          <p:cNvPr id="19" name="Shape 17"/>
+          <p:cNvSpPr/>
+          <p:nvPr/>
+        </p:nvSpPr>
+        <p:spPr>
+          <a:xfrm>
+            <a:off x="7470851" y="91440"/>
+            <a:ext cx="27432" cy="274320"/>
+          </a:xfrm>
+          <a:prstGeom prst="rect">
+            <a:avLst/>
+          </a:prstGeom>
+          <a:solidFill>
+            <a:srgbClr val="B45309"/>
+          </a:solidFill>
+          <a:ln w="12700">
+            <a:solidFill>
+              <a:srgbClr val="B45309"/>
+            </a:solidFill>
+            <a:prstDash val="solid"/>
+          </a:ln>
+        </p:spPr>
+      </p:sp>
+      <p:pic>
+        <p:nvPicPr>
+          <p:cNvPr id="20" name="Image 0" descr="preencoded.png">    </p:cNvPr>
+          <p:cNvPicPr>
+            <a:picLocks noChangeAspect="1"/>
+          </p:cNvPicPr>
+          <p:nvPr/>
+        </p:nvPicPr>
+        <p:blipFill>
+          <a:blip r:embed="rId1"/>
+          <a:stretch>
+            <a:fillRect/>
+          </a:stretch>
+        </p:blipFill>
+        <p:spPr>
+          <a:xfrm>
+            <a:off x="7544003" y="128016"/>
+            <a:ext cx="201168" cy="201168"/>
+          </a:xfrm>
+          <a:prstGeom prst="rect">
+            <a:avLst/>
+          </a:prstGeom>
+        </p:spPr>
+      </p:pic>
+      <p:sp>
+        <p:nvSpPr>
+          <p:cNvPr id="21" name="Text 18"/>
+          <p:cNvSpPr txBox="1"/>
+          <p:nvPr/>
+        </p:nvSpPr>
+        <p:spPr>
+          <a:xfrm>
+            <a:off x="7800035" y="91440"/>
+            <a:ext cx="3806444" cy="274320"/>
+          </a:xfrm>
+          <a:prstGeom prst="rect">
+            <a:avLst/>
+          </a:prstGeom>
+          <a:noFill/>
+          <a:ln/>
+        </p:spPr>
+        <p:txBody>
+          <a:bodyPr wrap="square" lIns="0" tIns="0" rIns="0" bIns="0" rtlCol="0" anchor="ctr"/>
+          <a:lstStyle/>
+          <a:p>
+            <a:pPr indent="0" marL="0">
+              <a:buNone/>
+            </a:pPr>
+            <a:r>
+              <a:rPr lang="en-US" sz="1100" b="1" dirty="0">
+                <a:solidFill>
+                  <a:srgbClr val="92400E"/>
+                </a:solidFill>
+                <a:latin typeface="Calibri" pitchFamily="34" charset="0"/>
+                <a:ea typeface="Calibri" pitchFamily="34" charset="-122"/>
+                <a:cs typeface="Calibri" pitchFamily="34" charset="-120"/>
+              </a:rPr>
+              <a:t>DA UTILIZZARE OGGI</a:t>
+            </a:r>
+            <a:pPr indent="0" marL="0">
+              <a:buNone/>
+            </a:pPr>
+            <a:r>
+              <a:rPr lang="en-US" sz="1100" dirty="0">
+                <a:solidFill>
+                  <a:srgbClr val="92400E"/>
+                </a:solidFill>
+                <a:latin typeface="Calibri" pitchFamily="34" charset="0"/>
+                <a:ea typeface="Calibri" pitchFamily="34" charset="-122"/>
+                <a:cs typeface="Calibri" pitchFamily="34" charset="-120"/>
+              </a:rPr>
+              <a:t> · le chiamate del runtime PRG32</a:t>
+            </a:r>
+            <a:endParaRPr lang="en-US" sz="1100" dirty="0"/>
+          </a:p>
+        </p:txBody>
+      </p:sp>
+      <p:sp>
+        <p:nvSpPr>
           <p:cNvPr id="25" name="Slide Number Placeholder 0"/>
           <p:cNvSpPr>
             <a:spLocks noGrp="1"/>
@@ -7795,6 +8380,133 @@
       </p:sp>
       <p:sp>
         <p:nvSpPr>
+          <p:cNvPr id="17" name="Shape 15"/>
+          <p:cNvSpPr/>
+          <p:nvPr/>
+        </p:nvSpPr>
+        <p:spPr>
+          <a:xfrm>
+            <a:off x="7920304" y="91440"/>
+            <a:ext cx="3722751" cy="274320"/>
+          </a:xfrm>
+          <a:prstGeom prst="rect">
+            <a:avLst/>
+          </a:prstGeom>
+          <a:solidFill>
+            <a:srgbClr val="E0F2FE"/>
+          </a:solidFill>
+          <a:ln w="12700">
+            <a:solidFill>
+              <a:srgbClr val="0369A1"/>
+            </a:solidFill>
+            <a:prstDash val="solid"/>
+          </a:ln>
+        </p:spPr>
+      </p:sp>
+      <p:sp>
+        <p:nvSpPr>
+          <p:cNvPr id="18" name="Shape 16"/>
+          <p:cNvSpPr/>
+          <p:nvPr/>
+        </p:nvSpPr>
+        <p:spPr>
+          <a:xfrm>
+            <a:off x="7920304" y="91440"/>
+            <a:ext cx="73152" cy="274320"/>
+          </a:xfrm>
+          <a:prstGeom prst="rect">
+            <a:avLst/>
+          </a:prstGeom>
+          <a:solidFill>
+            <a:srgbClr val="0369A1"/>
+          </a:solidFill>
+          <a:ln w="12700">
+            <a:solidFill>
+              <a:srgbClr val="0369A1"/>
+            </a:solidFill>
+            <a:prstDash val="solid"/>
+          </a:ln>
+        </p:spPr>
+      </p:sp>
+      <p:pic>
+        <p:nvPicPr>
+          <p:cNvPr id="19" name="Image 0" descr="preencoded.png">    </p:cNvPr>
+          <p:cNvPicPr>
+            <a:picLocks noChangeAspect="1"/>
+          </p:cNvPicPr>
+          <p:nvPr/>
+        </p:nvPicPr>
+        <p:blipFill>
+          <a:blip r:embed="rId1"/>
+          <a:stretch>
+            <a:fillRect/>
+          </a:stretch>
+        </p:blipFill>
+        <p:spPr>
+          <a:xfrm>
+            <a:off x="8048320" y="128016"/>
+            <a:ext cx="201168" cy="201168"/>
+          </a:xfrm>
+          <a:prstGeom prst="rect">
+            <a:avLst/>
+          </a:prstGeom>
+        </p:spPr>
+      </p:pic>
+      <p:sp>
+        <p:nvSpPr>
+          <p:cNvPr id="20" name="Text 17"/>
+          <p:cNvSpPr txBox="1"/>
+          <p:nvPr/>
+        </p:nvSpPr>
+        <p:spPr>
+          <a:xfrm>
+            <a:off x="8304352" y="91440"/>
+            <a:ext cx="3302127" cy="274320"/>
+          </a:xfrm>
+          <a:prstGeom prst="rect">
+            <a:avLst/>
+          </a:prstGeom>
+          <a:noFill/>
+          <a:ln/>
+        </p:spPr>
+        <p:txBody>
+          <a:bodyPr wrap="square" lIns="0" tIns="0" rIns="0" bIns="0" rtlCol="0" anchor="ctr"/>
+          <a:lstStyle/>
+          <a:p>
+            <a:pPr indent="0" marL="0">
+              <a:buNone/>
+            </a:pPr>
+            <a:r>
+              <a:rPr lang="en-US" sz="1100" b="1" dirty="0">
+                <a:solidFill>
+                  <a:srgbClr val="075985"/>
+                </a:solidFill>
+                <a:latin typeface="Calibri" pitchFamily="34" charset="0"/>
+                <a:ea typeface="Calibri" pitchFamily="34" charset="-122"/>
+                <a:cs typeface="Calibri" pitchFamily="34" charset="-120"/>
+              </a:rPr>
+              <a:t>DA COMPRENDERE OGGI</a:t>
+            </a:r>
+            <a:pPr indent="0" marL="0">
+              <a:buNone/>
+            </a:pPr>
+            <a:r>
+              <a:rPr lang="en-US" sz="1100" dirty="0">
+                <a:solidFill>
+                  <a:srgbClr val="075985"/>
+                </a:solidFill>
+                <a:latin typeface="Calibri" pitchFamily="34" charset="0"/>
+                <a:ea typeface="Calibri" pitchFamily="34" charset="-122"/>
+                <a:cs typeface="Calibri" pitchFamily="34" charset="-120"/>
+              </a:rPr>
+              <a:t> · comparatori e parità</a:t>
+            </a:r>
+            <a:endParaRPr lang="en-US" sz="1100" dirty="0"/>
+          </a:p>
+        </p:txBody>
+      </p:sp>
+      <p:sp>
+        <p:nvSpPr>
           <p:cNvPr id="25" name="Slide Number Placeholder 0"/>
           <p:cNvSpPr>
             <a:spLocks noGrp="1"/>
@@ -8571,6 +9283,158 @@
       </p:sp>
       <p:sp>
         <p:nvSpPr>
+          <p:cNvPr id="14" name="Shape 12"/>
+          <p:cNvSpPr/>
+          <p:nvPr/>
+        </p:nvSpPr>
+        <p:spPr>
+          <a:xfrm>
+            <a:off x="7415987" y="91440"/>
+            <a:ext cx="4227068" cy="274320"/>
+          </a:xfrm>
+          <a:prstGeom prst="rect">
+            <a:avLst/>
+          </a:prstGeom>
+          <a:solidFill>
+            <a:srgbClr val="FEF3C7"/>
+          </a:solidFill>
+          <a:ln w="12700">
+            <a:solidFill>
+              <a:srgbClr val="B45309"/>
+            </a:solidFill>
+            <a:prstDash val="solid"/>
+          </a:ln>
+        </p:spPr>
+      </p:sp>
+      <p:sp>
+        <p:nvSpPr>
+          <p:cNvPr id="15" name="Shape 13"/>
+          <p:cNvSpPr/>
+          <p:nvPr/>
+        </p:nvSpPr>
+        <p:spPr>
+          <a:xfrm>
+            <a:off x="7415987" y="91440"/>
+            <a:ext cx="27432" cy="274320"/>
+          </a:xfrm>
+          <a:prstGeom prst="rect">
+            <a:avLst/>
+          </a:prstGeom>
+          <a:solidFill>
+            <a:srgbClr val="B45309"/>
+          </a:solidFill>
+          <a:ln w="12700">
+            <a:solidFill>
+              <a:srgbClr val="B45309"/>
+            </a:solidFill>
+            <a:prstDash val="solid"/>
+          </a:ln>
+        </p:spPr>
+      </p:sp>
+      <p:sp>
+        <p:nvSpPr>
+          <p:cNvPr id="16" name="Shape 14"/>
+          <p:cNvSpPr/>
+          <p:nvPr/>
+        </p:nvSpPr>
+        <p:spPr>
+          <a:xfrm>
+            <a:off x="7470851" y="91440"/>
+            <a:ext cx="27432" cy="274320"/>
+          </a:xfrm>
+          <a:prstGeom prst="rect">
+            <a:avLst/>
+          </a:prstGeom>
+          <a:solidFill>
+            <a:srgbClr val="B45309"/>
+          </a:solidFill>
+          <a:ln w="12700">
+            <a:solidFill>
+              <a:srgbClr val="B45309"/>
+            </a:solidFill>
+            <a:prstDash val="solid"/>
+          </a:ln>
+        </p:spPr>
+      </p:sp>
+      <p:pic>
+        <p:nvPicPr>
+          <p:cNvPr id="17" name="Image 0" descr="preencoded.png">    </p:cNvPr>
+          <p:cNvPicPr>
+            <a:picLocks noChangeAspect="1"/>
+          </p:cNvPicPr>
+          <p:nvPr/>
+        </p:nvPicPr>
+        <p:blipFill>
+          <a:blip r:embed="rId1"/>
+          <a:stretch>
+            <a:fillRect/>
+          </a:stretch>
+        </p:blipFill>
+        <p:spPr>
+          <a:xfrm>
+            <a:off x="7544003" y="128016"/>
+            <a:ext cx="201168" cy="201168"/>
+          </a:xfrm>
+          <a:prstGeom prst="rect">
+            <a:avLst/>
+          </a:prstGeom>
+        </p:spPr>
+      </p:pic>
+      <p:sp>
+        <p:nvSpPr>
+          <p:cNvPr id="18" name="Text 15"/>
+          <p:cNvSpPr txBox="1"/>
+          <p:nvPr/>
+        </p:nvSpPr>
+        <p:spPr>
+          <a:xfrm>
+            <a:off x="7800035" y="91440"/>
+            <a:ext cx="3806444" cy="274320"/>
+          </a:xfrm>
+          <a:prstGeom prst="rect">
+            <a:avLst/>
+          </a:prstGeom>
+          <a:noFill/>
+          <a:ln/>
+        </p:spPr>
+        <p:txBody>
+          <a:bodyPr wrap="square" lIns="0" tIns="0" rIns="0" bIns="0" rtlCol="0" anchor="ctr"/>
+          <a:lstStyle/>
+          <a:p>
+            <a:pPr indent="0" marL="0">
+              <a:buNone/>
+            </a:pPr>
+            <a:r>
+              <a:rPr lang="en-US" sz="1100" b="1" dirty="0">
+                <a:solidFill>
+                  <a:srgbClr val="92400E"/>
+                </a:solidFill>
+                <a:latin typeface="Calibri" pitchFamily="34" charset="0"/>
+                <a:ea typeface="Calibri" pitchFamily="34" charset="-122"/>
+                <a:cs typeface="Calibri" pitchFamily="34" charset="-120"/>
+              </a:rPr>
+              <a:t>DA UTILIZZARE OGGI</a:t>
+            </a:r>
+            <a:pPr indent="0" marL="0">
+              <a:buNone/>
+            </a:pPr>
+            <a:r>
+              <a:rPr lang="en-US" sz="1100" dirty="0">
+                <a:solidFill>
+                  <a:srgbClr val="92400E"/>
+                </a:solidFill>
+                <a:latin typeface="Calibri" pitchFamily="34" charset="0"/>
+                <a:ea typeface="Calibri" pitchFamily="34" charset="-122"/>
+                <a:cs typeface="Calibri" pitchFamily="34" charset="-120"/>
+              </a:rPr>
+              <a:t> · le chiamate del runtime PRG32</a:t>
+            </a:r>
+            <a:endParaRPr lang="en-US" sz="1100" dirty="0"/>
+          </a:p>
+        </p:txBody>
+      </p:sp>
+      <p:sp>
+        <p:nvSpPr>
           <p:cNvPr id="25" name="Slide Number Placeholder 0"/>
           <p:cNvSpPr>
             <a:spLocks noGrp="1"/>
@@ -9656,6 +10520,172 @@
       </p:sp>
       <p:sp>
         <p:nvSpPr>
+          <p:cNvPr id="17" name="Shape 15"/>
+          <p:cNvSpPr/>
+          <p:nvPr/>
+        </p:nvSpPr>
+        <p:spPr>
+          <a:xfrm>
+            <a:off x="6650431" y="91440"/>
+            <a:ext cx="4992624" cy="274320"/>
+          </a:xfrm>
+          <a:prstGeom prst="rect">
+            <a:avLst/>
+          </a:prstGeom>
+          <a:solidFill>
+            <a:srgbClr val="FEF3C7"/>
+          </a:solidFill>
+          <a:ln w="12700">
+            <a:solidFill>
+              <a:srgbClr val="B45309"/>
+            </a:solidFill>
+            <a:prstDash val="solid"/>
+          </a:ln>
+        </p:spPr>
+      </p:sp>
+      <p:sp>
+        <p:nvSpPr>
+          <p:cNvPr id="18" name="Shape 16"/>
+          <p:cNvSpPr/>
+          <p:nvPr/>
+        </p:nvSpPr>
+        <p:spPr>
+          <a:xfrm>
+            <a:off x="6650431" y="91440"/>
+            <a:ext cx="27432" cy="274320"/>
+          </a:xfrm>
+          <a:prstGeom prst="rect">
+            <a:avLst/>
+          </a:prstGeom>
+          <a:solidFill>
+            <a:srgbClr val="B45309"/>
+          </a:solidFill>
+          <a:ln w="12700">
+            <a:solidFill>
+              <a:srgbClr val="B45309"/>
+            </a:solidFill>
+            <a:prstDash val="solid"/>
+          </a:ln>
+        </p:spPr>
+      </p:sp>
+      <p:sp>
+        <p:nvSpPr>
+          <p:cNvPr id="19" name="Shape 17"/>
+          <p:cNvSpPr/>
+          <p:nvPr/>
+        </p:nvSpPr>
+        <p:spPr>
+          <a:xfrm>
+            <a:off x="6705295" y="91440"/>
+            <a:ext cx="27432" cy="274320"/>
+          </a:xfrm>
+          <a:prstGeom prst="rect">
+            <a:avLst/>
+          </a:prstGeom>
+          <a:solidFill>
+            <a:srgbClr val="B45309"/>
+          </a:solidFill>
+          <a:ln w="12700">
+            <a:solidFill>
+              <a:srgbClr val="B45309"/>
+            </a:solidFill>
+            <a:prstDash val="solid"/>
+          </a:ln>
+        </p:spPr>
+      </p:sp>
+      <p:pic>
+        <p:nvPicPr>
+          <p:cNvPr id="20" name="Image 0" descr="preencoded.png">    </p:cNvPr>
+          <p:cNvPicPr>
+            <a:picLocks noChangeAspect="1"/>
+          </p:cNvPicPr>
+          <p:nvPr/>
+        </p:nvPicPr>
+        <p:blipFill>
+          <a:blip r:embed="rId1"/>
+          <a:stretch>
+            <a:fillRect/>
+          </a:stretch>
+        </p:blipFill>
+        <p:spPr>
+          <a:xfrm>
+            <a:off x="6778447" y="128016"/>
+            <a:ext cx="201168" cy="201168"/>
+          </a:xfrm>
+          <a:prstGeom prst="rect">
+            <a:avLst/>
+          </a:prstGeom>
+        </p:spPr>
+      </p:pic>
+      <p:sp>
+        <p:nvSpPr>
+          <p:cNvPr id="21" name="Text 18"/>
+          <p:cNvSpPr txBox="1"/>
+          <p:nvPr/>
+        </p:nvSpPr>
+        <p:spPr>
+          <a:xfrm>
+            <a:off x="7034479" y="91440"/>
+            <a:ext cx="4572000" cy="274320"/>
+          </a:xfrm>
+          <a:prstGeom prst="rect">
+            <a:avLst/>
+          </a:prstGeom>
+          <a:noFill/>
+          <a:ln/>
+        </p:spPr>
+        <p:txBody>
+          <a:bodyPr wrap="square" lIns="0" tIns="0" rIns="0" bIns="0" rtlCol="0" anchor="ctr"/>
+          <a:lstStyle/>
+          <a:p>
+            <a:pPr indent="0" marL="0">
+              <a:buNone/>
+            </a:pPr>
+            <a:r>
+              <a:rPr lang="en-US" sz="1100" b="1" dirty="0">
+                <a:solidFill>
+                  <a:srgbClr val="92400E"/>
+                </a:solidFill>
+                <a:latin typeface="Calibri" pitchFamily="34" charset="0"/>
+                <a:ea typeface="Calibri" pitchFamily="34" charset="-122"/>
+                <a:cs typeface="Calibri" pitchFamily="34" charset="-120"/>
+              </a:rPr>
+              <a:t>DA UTILIZZARE OGGI</a:t>
+            </a:r>
+            <a:pPr indent="0" marL="0">
+              <a:buNone/>
+            </a:pPr>
+            <a:r>
+              <a:rPr lang="en-US" sz="1100" dirty="0">
+                <a:solidFill>
+                  <a:srgbClr val="92400E"/>
+                </a:solidFill>
+                <a:latin typeface="Calibri" pitchFamily="34" charset="0"/>
+                <a:ea typeface="Calibri" pitchFamily="34" charset="-122"/>
+                <a:cs typeface="Calibri" pitchFamily="34" charset="-120"/>
+              </a:rPr>
+              <a:t> · la convenzione di chiamata</a:t>
+            </a:r>
+            <a:pPr indent="0" marL="0">
+              <a:buNone/>
+            </a:pPr>
+            <a:r>
+              <a:rPr lang="en-US" sz="1100" b="1" dirty="0">
+                <a:solidFill>
+                  <a:srgbClr val="92400E"/>
+                </a:solidFill>
+                <a:latin typeface="Calibri" pitchFamily="34" charset="0"/>
+                <a:ea typeface="Calibri" pitchFamily="34" charset="-122"/>
+                <a:cs typeface="Calibri" pitchFamily="34" charset="-120"/>
+              </a:rPr>
+              <a:t> → Lezione 18</a:t>
+            </a:r>
+            <a:endParaRPr lang="en-US" sz="1100" dirty="0"/>
+          </a:p>
+        </p:txBody>
+      </p:sp>
+      <p:sp>
+        <p:nvSpPr>
           <p:cNvPr id="25" name="Slide Number Placeholder 0"/>
           <p:cNvSpPr>
             <a:spLocks noGrp="1"/>
@@ -10430,6 +11460,133 @@
       </p:sp>
       <p:sp>
         <p:nvSpPr>
+          <p:cNvPr id="14" name="Shape 12"/>
+          <p:cNvSpPr/>
+          <p:nvPr/>
+        </p:nvSpPr>
+        <p:spPr>
+          <a:xfrm>
+            <a:off x="7526350" y="91440"/>
+            <a:ext cx="4116705" cy="274320"/>
+          </a:xfrm>
+          <a:prstGeom prst="rect">
+            <a:avLst/>
+          </a:prstGeom>
+          <a:solidFill>
+            <a:srgbClr val="E0F2FE"/>
+          </a:solidFill>
+          <a:ln w="12700">
+            <a:solidFill>
+              <a:srgbClr val="0369A1"/>
+            </a:solidFill>
+            <a:prstDash val="solid"/>
+          </a:ln>
+        </p:spPr>
+      </p:sp>
+      <p:sp>
+        <p:nvSpPr>
+          <p:cNvPr id="15" name="Shape 13"/>
+          <p:cNvSpPr/>
+          <p:nvPr/>
+        </p:nvSpPr>
+        <p:spPr>
+          <a:xfrm>
+            <a:off x="7526350" y="91440"/>
+            <a:ext cx="73152" cy="274320"/>
+          </a:xfrm>
+          <a:prstGeom prst="rect">
+            <a:avLst/>
+          </a:prstGeom>
+          <a:solidFill>
+            <a:srgbClr val="0369A1"/>
+          </a:solidFill>
+          <a:ln w="12700">
+            <a:solidFill>
+              <a:srgbClr val="0369A1"/>
+            </a:solidFill>
+            <a:prstDash val="solid"/>
+          </a:ln>
+        </p:spPr>
+      </p:sp>
+      <p:pic>
+        <p:nvPicPr>
+          <p:cNvPr id="16" name="Image 0" descr="preencoded.png">    </p:cNvPr>
+          <p:cNvPicPr>
+            <a:picLocks noChangeAspect="1"/>
+          </p:cNvPicPr>
+          <p:nvPr/>
+        </p:nvPicPr>
+        <p:blipFill>
+          <a:blip r:embed="rId1"/>
+          <a:stretch>
+            <a:fillRect/>
+          </a:stretch>
+        </p:blipFill>
+        <p:spPr>
+          <a:xfrm>
+            <a:off x="7654366" y="128016"/>
+            <a:ext cx="201168" cy="201168"/>
+          </a:xfrm>
+          <a:prstGeom prst="rect">
+            <a:avLst/>
+          </a:prstGeom>
+        </p:spPr>
+      </p:pic>
+      <p:sp>
+        <p:nvSpPr>
+          <p:cNvPr id="17" name="Text 14"/>
+          <p:cNvSpPr txBox="1"/>
+          <p:nvPr/>
+        </p:nvSpPr>
+        <p:spPr>
+          <a:xfrm>
+            <a:off x="7910398" y="91440"/>
+            <a:ext cx="3696081" cy="274320"/>
+          </a:xfrm>
+          <a:prstGeom prst="rect">
+            <a:avLst/>
+          </a:prstGeom>
+          <a:noFill/>
+          <a:ln/>
+        </p:spPr>
+        <p:txBody>
+          <a:bodyPr wrap="square" lIns="0" tIns="0" rIns="0" bIns="0" rtlCol="0" anchor="ctr"/>
+          <a:lstStyle/>
+          <a:p>
+            <a:pPr indent="0" marL="0">
+              <a:buNone/>
+            </a:pPr>
+            <a:r>
+              <a:rPr lang="en-US" sz="1100" b="1" dirty="0">
+                <a:solidFill>
+                  <a:srgbClr val="075985"/>
+                </a:solidFill>
+                <a:latin typeface="Calibri" pitchFamily="34" charset="0"/>
+                <a:ea typeface="Calibri" pitchFamily="34" charset="-122"/>
+                <a:cs typeface="Calibri" pitchFamily="34" charset="-120"/>
+              </a:rPr>
+              <a:t>DA COMPRENDERE OGGI</a:t>
+            </a:r>
+            <a:pPr indent="0" marL="0">
+              <a:buNone/>
+            </a:pPr>
+            <a:r>
+              <a:rPr lang="en-US" sz="1100" dirty="0">
+                <a:solidFill>
+                  <a:srgbClr val="075985"/>
+                </a:solidFill>
+                <a:latin typeface="Calibri" pitchFamily="34" charset="0"/>
+                <a:ea typeface="Calibri" pitchFamily="34" charset="-122"/>
+                <a:cs typeface="Calibri" pitchFamily="34" charset="-120"/>
+              </a:rPr>
+              <a:t> · gli argomenti in a0 ... a7</a:t>
+            </a:r>
+            <a:endParaRPr lang="en-US" sz="1100" dirty="0"/>
+          </a:p>
+        </p:txBody>
+      </p:sp>
+      <p:sp>
+        <p:nvSpPr>
           <p:cNvPr id="25" name="Slide Number Placeholder 0"/>
           <p:cNvSpPr>
             <a:spLocks noGrp="1"/>
@@ -11209,6 +12366,133 @@
       </p:sp>
       <p:sp>
         <p:nvSpPr>
+          <p:cNvPr id="14" name="Shape 12"/>
+          <p:cNvSpPr/>
+          <p:nvPr/>
+        </p:nvSpPr>
+        <p:spPr>
+          <a:xfrm>
+            <a:off x="7526350" y="91440"/>
+            <a:ext cx="4116705" cy="274320"/>
+          </a:xfrm>
+          <a:prstGeom prst="rect">
+            <a:avLst/>
+          </a:prstGeom>
+          <a:solidFill>
+            <a:srgbClr val="E0F2FE"/>
+          </a:solidFill>
+          <a:ln w="12700">
+            <a:solidFill>
+              <a:srgbClr val="0369A1"/>
+            </a:solidFill>
+            <a:prstDash val="solid"/>
+          </a:ln>
+        </p:spPr>
+      </p:sp>
+      <p:sp>
+        <p:nvSpPr>
+          <p:cNvPr id="15" name="Shape 13"/>
+          <p:cNvSpPr/>
+          <p:nvPr/>
+        </p:nvSpPr>
+        <p:spPr>
+          <a:xfrm>
+            <a:off x="7526350" y="91440"/>
+            <a:ext cx="73152" cy="274320"/>
+          </a:xfrm>
+          <a:prstGeom prst="rect">
+            <a:avLst/>
+          </a:prstGeom>
+          <a:solidFill>
+            <a:srgbClr val="0369A1"/>
+          </a:solidFill>
+          <a:ln w="12700">
+            <a:solidFill>
+              <a:srgbClr val="0369A1"/>
+            </a:solidFill>
+            <a:prstDash val="solid"/>
+          </a:ln>
+        </p:spPr>
+      </p:sp>
+      <p:pic>
+        <p:nvPicPr>
+          <p:cNvPr id="16" name="Image 0" descr="preencoded.png">    </p:cNvPr>
+          <p:cNvPicPr>
+            <a:picLocks noChangeAspect="1"/>
+          </p:cNvPicPr>
+          <p:nvPr/>
+        </p:nvPicPr>
+        <p:blipFill>
+          <a:blip r:embed="rId1"/>
+          <a:stretch>
+            <a:fillRect/>
+          </a:stretch>
+        </p:blipFill>
+        <p:spPr>
+          <a:xfrm>
+            <a:off x="7654366" y="128016"/>
+            <a:ext cx="201168" cy="201168"/>
+          </a:xfrm>
+          <a:prstGeom prst="rect">
+            <a:avLst/>
+          </a:prstGeom>
+        </p:spPr>
+      </p:pic>
+      <p:sp>
+        <p:nvSpPr>
+          <p:cNvPr id="17" name="Text 14"/>
+          <p:cNvSpPr txBox="1"/>
+          <p:nvPr/>
+        </p:nvSpPr>
+        <p:spPr>
+          <a:xfrm>
+            <a:off x="7910398" y="91440"/>
+            <a:ext cx="3696081" cy="274320"/>
+          </a:xfrm>
+          <a:prstGeom prst="rect">
+            <a:avLst/>
+          </a:prstGeom>
+          <a:noFill/>
+          <a:ln/>
+        </p:spPr>
+        <p:txBody>
+          <a:bodyPr wrap="square" lIns="0" tIns="0" rIns="0" bIns="0" rtlCol="0" anchor="ctr"/>
+          <a:lstStyle/>
+          <a:p>
+            <a:pPr indent="0" marL="0">
+              <a:buNone/>
+            </a:pPr>
+            <a:r>
+              <a:rPr lang="en-US" sz="1100" b="1" dirty="0">
+                <a:solidFill>
+                  <a:srgbClr val="075985"/>
+                </a:solidFill>
+                <a:latin typeface="Calibri" pitchFamily="34" charset="0"/>
+                <a:ea typeface="Calibri" pitchFamily="34" charset="-122"/>
+                <a:cs typeface="Calibri" pitchFamily="34" charset="-120"/>
+              </a:rPr>
+              <a:t>DA COMPRENDERE OGGI</a:t>
+            </a:r>
+            <a:pPr indent="0" marL="0">
+              <a:buNone/>
+            </a:pPr>
+            <a:r>
+              <a:rPr lang="en-US" sz="1100" dirty="0">
+                <a:solidFill>
+                  <a:srgbClr val="075985"/>
+                </a:solidFill>
+                <a:latin typeface="Calibri" pitchFamily="34" charset="0"/>
+                <a:ea typeface="Calibri" pitchFamily="34" charset="-122"/>
+                <a:cs typeface="Calibri" pitchFamily="34" charset="-120"/>
+              </a:rPr>
+              <a:t> · gli argomenti in a0 ... a7</a:t>
+            </a:r>
+            <a:endParaRPr lang="en-US" sz="1100" dirty="0"/>
+          </a:p>
+        </p:txBody>
+      </p:sp>
+      <p:sp>
+        <p:nvSpPr>
           <p:cNvPr id="25" name="Slide Number Placeholder 0"/>
           <p:cNvSpPr>
             <a:spLocks noGrp="1"/>
@@ -13164,6 +14448,158 @@
       </p:sp>
       <p:sp>
         <p:nvSpPr>
+          <p:cNvPr id="17" name="Shape 15"/>
+          <p:cNvSpPr/>
+          <p:nvPr/>
+        </p:nvSpPr>
+        <p:spPr>
+          <a:xfrm>
+            <a:off x="7875600" y="91440"/>
+            <a:ext cx="3767455" cy="274320"/>
+          </a:xfrm>
+          <a:prstGeom prst="rect">
+            <a:avLst/>
+          </a:prstGeom>
+          <a:solidFill>
+            <a:srgbClr val="FEF3C7"/>
+          </a:solidFill>
+          <a:ln w="12700">
+            <a:solidFill>
+              <a:srgbClr val="B45309"/>
+            </a:solidFill>
+            <a:prstDash val="solid"/>
+          </a:ln>
+        </p:spPr>
+      </p:sp>
+      <p:sp>
+        <p:nvSpPr>
+          <p:cNvPr id="18" name="Shape 16"/>
+          <p:cNvSpPr/>
+          <p:nvPr/>
+        </p:nvSpPr>
+        <p:spPr>
+          <a:xfrm>
+            <a:off x="7875600" y="91440"/>
+            <a:ext cx="27432" cy="274320"/>
+          </a:xfrm>
+          <a:prstGeom prst="rect">
+            <a:avLst/>
+          </a:prstGeom>
+          <a:solidFill>
+            <a:srgbClr val="B45309"/>
+          </a:solidFill>
+          <a:ln w="12700">
+            <a:solidFill>
+              <a:srgbClr val="B45309"/>
+            </a:solidFill>
+            <a:prstDash val="solid"/>
+          </a:ln>
+        </p:spPr>
+      </p:sp>
+      <p:sp>
+        <p:nvSpPr>
+          <p:cNvPr id="19" name="Shape 17"/>
+          <p:cNvSpPr/>
+          <p:nvPr/>
+        </p:nvSpPr>
+        <p:spPr>
+          <a:xfrm>
+            <a:off x="7930464" y="91440"/>
+            <a:ext cx="27432" cy="274320"/>
+          </a:xfrm>
+          <a:prstGeom prst="rect">
+            <a:avLst/>
+          </a:prstGeom>
+          <a:solidFill>
+            <a:srgbClr val="B45309"/>
+          </a:solidFill>
+          <a:ln w="12700">
+            <a:solidFill>
+              <a:srgbClr val="B45309"/>
+            </a:solidFill>
+            <a:prstDash val="solid"/>
+          </a:ln>
+        </p:spPr>
+      </p:sp>
+      <p:pic>
+        <p:nvPicPr>
+          <p:cNvPr id="20" name="Image 0" descr="preencoded.png">    </p:cNvPr>
+          <p:cNvPicPr>
+            <a:picLocks noChangeAspect="1"/>
+          </p:cNvPicPr>
+          <p:nvPr/>
+        </p:nvPicPr>
+        <p:blipFill>
+          <a:blip r:embed="rId1"/>
+          <a:stretch>
+            <a:fillRect/>
+          </a:stretch>
+        </p:blipFill>
+        <p:spPr>
+          <a:xfrm>
+            <a:off x="8003616" y="128016"/>
+            <a:ext cx="201168" cy="201168"/>
+          </a:xfrm>
+          <a:prstGeom prst="rect">
+            <a:avLst/>
+          </a:prstGeom>
+        </p:spPr>
+      </p:pic>
+      <p:sp>
+        <p:nvSpPr>
+          <p:cNvPr id="21" name="Text 18"/>
+          <p:cNvSpPr txBox="1"/>
+          <p:nvPr/>
+        </p:nvSpPr>
+        <p:spPr>
+          <a:xfrm>
+            <a:off x="8259648" y="91440"/>
+            <a:ext cx="3346831" cy="274320"/>
+          </a:xfrm>
+          <a:prstGeom prst="rect">
+            <a:avLst/>
+          </a:prstGeom>
+          <a:noFill/>
+          <a:ln/>
+        </p:spPr>
+        <p:txBody>
+          <a:bodyPr wrap="square" lIns="0" tIns="0" rIns="0" bIns="0" rtlCol="0" anchor="ctr"/>
+          <a:lstStyle/>
+          <a:p>
+            <a:pPr indent="0" marL="0">
+              <a:buNone/>
+            </a:pPr>
+            <a:r>
+              <a:rPr lang="en-US" sz="1100" b="1" dirty="0">
+                <a:solidFill>
+                  <a:srgbClr val="92400E"/>
+                </a:solidFill>
+                <a:latin typeface="Calibri" pitchFamily="34" charset="0"/>
+                <a:ea typeface="Calibri" pitchFamily="34" charset="-122"/>
+                <a:cs typeface="Calibri" pitchFamily="34" charset="-120"/>
+              </a:rPr>
+              <a:t>DA UTILIZZARE OGGI</a:t>
+            </a:r>
+            <a:pPr indent="0" marL="0">
+              <a:buNone/>
+            </a:pPr>
+            <a:r>
+              <a:rPr lang="en-US" sz="1100" dirty="0">
+                <a:solidFill>
+                  <a:srgbClr val="92400E"/>
+                </a:solidFill>
+                <a:latin typeface="Calibri" pitchFamily="34" charset="0"/>
+                <a:ea typeface="Calibri" pitchFamily="34" charset="-122"/>
+                <a:cs typeface="Calibri" pitchFamily="34" charset="-120"/>
+              </a:rPr>
+              <a:t> · gli strumenti di PRG32</a:t>
+            </a:r>
+            <a:endParaRPr lang="en-US" sz="1100" dirty="0"/>
+          </a:p>
+        </p:txBody>
+      </p:sp>
+      <p:sp>
+        <p:nvSpPr>
           <p:cNvPr id="25" name="Slide Number Placeholder 0"/>
           <p:cNvSpPr>
             <a:spLocks noGrp="1"/>
@@ -14000,6 +15436,158 @@
       </p:sp>
       <p:sp>
         <p:nvSpPr>
+          <p:cNvPr id="17" name="Shape 15"/>
+          <p:cNvSpPr/>
+          <p:nvPr/>
+        </p:nvSpPr>
+        <p:spPr>
+          <a:xfrm>
+            <a:off x="7875600" y="91440"/>
+            <a:ext cx="3767455" cy="274320"/>
+          </a:xfrm>
+          <a:prstGeom prst="rect">
+            <a:avLst/>
+          </a:prstGeom>
+          <a:solidFill>
+            <a:srgbClr val="FEF3C7"/>
+          </a:solidFill>
+          <a:ln w="12700">
+            <a:solidFill>
+              <a:srgbClr val="B45309"/>
+            </a:solidFill>
+            <a:prstDash val="solid"/>
+          </a:ln>
+        </p:spPr>
+      </p:sp>
+      <p:sp>
+        <p:nvSpPr>
+          <p:cNvPr id="18" name="Shape 16"/>
+          <p:cNvSpPr/>
+          <p:nvPr/>
+        </p:nvSpPr>
+        <p:spPr>
+          <a:xfrm>
+            <a:off x="7875600" y="91440"/>
+            <a:ext cx="27432" cy="274320"/>
+          </a:xfrm>
+          <a:prstGeom prst="rect">
+            <a:avLst/>
+          </a:prstGeom>
+          <a:solidFill>
+            <a:srgbClr val="B45309"/>
+          </a:solidFill>
+          <a:ln w="12700">
+            <a:solidFill>
+              <a:srgbClr val="B45309"/>
+            </a:solidFill>
+            <a:prstDash val="solid"/>
+          </a:ln>
+        </p:spPr>
+      </p:sp>
+      <p:sp>
+        <p:nvSpPr>
+          <p:cNvPr id="19" name="Shape 17"/>
+          <p:cNvSpPr/>
+          <p:nvPr/>
+        </p:nvSpPr>
+        <p:spPr>
+          <a:xfrm>
+            <a:off x="7930464" y="91440"/>
+            <a:ext cx="27432" cy="274320"/>
+          </a:xfrm>
+          <a:prstGeom prst="rect">
+            <a:avLst/>
+          </a:prstGeom>
+          <a:solidFill>
+            <a:srgbClr val="B45309"/>
+          </a:solidFill>
+          <a:ln w="12700">
+            <a:solidFill>
+              <a:srgbClr val="B45309"/>
+            </a:solidFill>
+            <a:prstDash val="solid"/>
+          </a:ln>
+        </p:spPr>
+      </p:sp>
+      <p:pic>
+        <p:nvPicPr>
+          <p:cNvPr id="20" name="Image 0" descr="preencoded.png">    </p:cNvPr>
+          <p:cNvPicPr>
+            <a:picLocks noChangeAspect="1"/>
+          </p:cNvPicPr>
+          <p:nvPr/>
+        </p:nvPicPr>
+        <p:blipFill>
+          <a:blip r:embed="rId1"/>
+          <a:stretch>
+            <a:fillRect/>
+          </a:stretch>
+        </p:blipFill>
+        <p:spPr>
+          <a:xfrm>
+            <a:off x="8003616" y="128016"/>
+            <a:ext cx="201168" cy="201168"/>
+          </a:xfrm>
+          <a:prstGeom prst="rect">
+            <a:avLst/>
+          </a:prstGeom>
+        </p:spPr>
+      </p:pic>
+      <p:sp>
+        <p:nvSpPr>
+          <p:cNvPr id="21" name="Text 18"/>
+          <p:cNvSpPr txBox="1"/>
+          <p:nvPr/>
+        </p:nvSpPr>
+        <p:spPr>
+          <a:xfrm>
+            <a:off x="8259648" y="91440"/>
+            <a:ext cx="3346831" cy="274320"/>
+          </a:xfrm>
+          <a:prstGeom prst="rect">
+            <a:avLst/>
+          </a:prstGeom>
+          <a:noFill/>
+          <a:ln/>
+        </p:spPr>
+        <p:txBody>
+          <a:bodyPr wrap="square" lIns="0" tIns="0" rIns="0" bIns="0" rtlCol="0" anchor="ctr"/>
+          <a:lstStyle/>
+          <a:p>
+            <a:pPr indent="0" marL="0">
+              <a:buNone/>
+            </a:pPr>
+            <a:r>
+              <a:rPr lang="en-US" sz="1100" b="1" dirty="0">
+                <a:solidFill>
+                  <a:srgbClr val="92400E"/>
+                </a:solidFill>
+                <a:latin typeface="Calibri" pitchFamily="34" charset="0"/>
+                <a:ea typeface="Calibri" pitchFamily="34" charset="-122"/>
+                <a:cs typeface="Calibri" pitchFamily="34" charset="-120"/>
+              </a:rPr>
+              <a:t>DA UTILIZZARE OGGI</a:t>
+            </a:r>
+            <a:pPr indent="0" marL="0">
+              <a:buNone/>
+            </a:pPr>
+            <a:r>
+              <a:rPr lang="en-US" sz="1100" dirty="0">
+                <a:solidFill>
+                  <a:srgbClr val="92400E"/>
+                </a:solidFill>
+                <a:latin typeface="Calibri" pitchFamily="34" charset="0"/>
+                <a:ea typeface="Calibri" pitchFamily="34" charset="-122"/>
+                <a:cs typeface="Calibri" pitchFamily="34" charset="-120"/>
+              </a:rPr>
+              <a:t> · gli strumenti di PRG32</a:t>
+            </a:r>
+            <a:endParaRPr lang="en-US" sz="1100" dirty="0"/>
+          </a:p>
+        </p:txBody>
+      </p:sp>
+      <p:sp>
+        <p:nvSpPr>
           <p:cNvPr id="25" name="Slide Number Placeholder 0"/>
           <p:cNvSpPr>
             <a:spLocks noGrp="1"/>
@@ -14829,6 +16417,158 @@
                 <a:cs typeface="Calibri" pitchFamily="34" charset="-120"/>
               </a:rPr>
               <a:t>Schermo nero: confrontate il cablaggio del display con il firmware</a:t>
+            </a:r>
+            <a:endParaRPr lang="en-US" sz="1100" dirty="0"/>
+          </a:p>
+        </p:txBody>
+      </p:sp>
+      <p:sp>
+        <p:nvSpPr>
+          <p:cNvPr id="17" name="Shape 15"/>
+          <p:cNvSpPr/>
+          <p:nvPr/>
+        </p:nvSpPr>
+        <p:spPr>
+          <a:xfrm>
+            <a:off x="7875600" y="91440"/>
+            <a:ext cx="3767455" cy="274320"/>
+          </a:xfrm>
+          <a:prstGeom prst="rect">
+            <a:avLst/>
+          </a:prstGeom>
+          <a:solidFill>
+            <a:srgbClr val="FEF3C7"/>
+          </a:solidFill>
+          <a:ln w="12700">
+            <a:solidFill>
+              <a:srgbClr val="B45309"/>
+            </a:solidFill>
+            <a:prstDash val="solid"/>
+          </a:ln>
+        </p:spPr>
+      </p:sp>
+      <p:sp>
+        <p:nvSpPr>
+          <p:cNvPr id="18" name="Shape 16"/>
+          <p:cNvSpPr/>
+          <p:nvPr/>
+        </p:nvSpPr>
+        <p:spPr>
+          <a:xfrm>
+            <a:off x="7875600" y="91440"/>
+            <a:ext cx="27432" cy="274320"/>
+          </a:xfrm>
+          <a:prstGeom prst="rect">
+            <a:avLst/>
+          </a:prstGeom>
+          <a:solidFill>
+            <a:srgbClr val="B45309"/>
+          </a:solidFill>
+          <a:ln w="12700">
+            <a:solidFill>
+              <a:srgbClr val="B45309"/>
+            </a:solidFill>
+            <a:prstDash val="solid"/>
+          </a:ln>
+        </p:spPr>
+      </p:sp>
+      <p:sp>
+        <p:nvSpPr>
+          <p:cNvPr id="19" name="Shape 17"/>
+          <p:cNvSpPr/>
+          <p:nvPr/>
+        </p:nvSpPr>
+        <p:spPr>
+          <a:xfrm>
+            <a:off x="7930464" y="91440"/>
+            <a:ext cx="27432" cy="274320"/>
+          </a:xfrm>
+          <a:prstGeom prst="rect">
+            <a:avLst/>
+          </a:prstGeom>
+          <a:solidFill>
+            <a:srgbClr val="B45309"/>
+          </a:solidFill>
+          <a:ln w="12700">
+            <a:solidFill>
+              <a:srgbClr val="B45309"/>
+            </a:solidFill>
+            <a:prstDash val="solid"/>
+          </a:ln>
+        </p:spPr>
+      </p:sp>
+      <p:pic>
+        <p:nvPicPr>
+          <p:cNvPr id="20" name="Image 0" descr="preencoded.png">    </p:cNvPr>
+          <p:cNvPicPr>
+            <a:picLocks noChangeAspect="1"/>
+          </p:cNvPicPr>
+          <p:nvPr/>
+        </p:nvPicPr>
+        <p:blipFill>
+          <a:blip r:embed="rId1"/>
+          <a:stretch>
+            <a:fillRect/>
+          </a:stretch>
+        </p:blipFill>
+        <p:spPr>
+          <a:xfrm>
+            <a:off x="8003616" y="128016"/>
+            <a:ext cx="201168" cy="201168"/>
+          </a:xfrm>
+          <a:prstGeom prst="rect">
+            <a:avLst/>
+          </a:prstGeom>
+        </p:spPr>
+      </p:pic>
+      <p:sp>
+        <p:nvSpPr>
+          <p:cNvPr id="21" name="Text 18"/>
+          <p:cNvSpPr txBox="1"/>
+          <p:nvPr/>
+        </p:nvSpPr>
+        <p:spPr>
+          <a:xfrm>
+            <a:off x="8259648" y="91440"/>
+            <a:ext cx="3346831" cy="274320"/>
+          </a:xfrm>
+          <a:prstGeom prst="rect">
+            <a:avLst/>
+          </a:prstGeom>
+          <a:noFill/>
+          <a:ln/>
+        </p:spPr>
+        <p:txBody>
+          <a:bodyPr wrap="square" lIns="0" tIns="0" rIns="0" bIns="0" rtlCol="0" anchor="ctr"/>
+          <a:lstStyle/>
+          <a:p>
+            <a:pPr indent="0" marL="0">
+              <a:buNone/>
+            </a:pPr>
+            <a:r>
+              <a:rPr lang="en-US" sz="1100" b="1" dirty="0">
+                <a:solidFill>
+                  <a:srgbClr val="92400E"/>
+                </a:solidFill>
+                <a:latin typeface="Calibri" pitchFamily="34" charset="0"/>
+                <a:ea typeface="Calibri" pitchFamily="34" charset="-122"/>
+                <a:cs typeface="Calibri" pitchFamily="34" charset="-120"/>
+              </a:rPr>
+              <a:t>DA UTILIZZARE OGGI</a:t>
+            </a:r>
+            <a:pPr indent="0" marL="0">
+              <a:buNone/>
+            </a:pPr>
+            <a:r>
+              <a:rPr lang="en-US" sz="1100" dirty="0">
+                <a:solidFill>
+                  <a:srgbClr val="92400E"/>
+                </a:solidFill>
+                <a:latin typeface="Calibri" pitchFamily="34" charset="0"/>
+                <a:ea typeface="Calibri" pitchFamily="34" charset="-122"/>
+                <a:cs typeface="Calibri" pitchFamily="34" charset="-120"/>
+              </a:rPr>
+              <a:t> · gli strumenti di PRG32</a:t>
             </a:r>
             <a:endParaRPr lang="en-US" sz="1100" dirty="0"/>
           </a:p>
@@ -16217,6 +17957,158 @@
       </p:graphicFrame>
       <p:sp>
         <p:nvSpPr>
+          <p:cNvPr id="4" name="Shape 1"/>
+          <p:cNvSpPr/>
+          <p:nvPr/>
+        </p:nvSpPr>
+        <p:spPr>
+          <a:xfrm>
+            <a:off x="7875600" y="91440"/>
+            <a:ext cx="3767455" cy="274320"/>
+          </a:xfrm>
+          <a:prstGeom prst="rect">
+            <a:avLst/>
+          </a:prstGeom>
+          <a:solidFill>
+            <a:srgbClr val="FEF3C7"/>
+          </a:solidFill>
+          <a:ln w="12700">
+            <a:solidFill>
+              <a:srgbClr val="B45309"/>
+            </a:solidFill>
+            <a:prstDash val="solid"/>
+          </a:ln>
+        </p:spPr>
+      </p:sp>
+      <p:sp>
+        <p:nvSpPr>
+          <p:cNvPr id="5" name="Shape 2"/>
+          <p:cNvSpPr/>
+          <p:nvPr/>
+        </p:nvSpPr>
+        <p:spPr>
+          <a:xfrm>
+            <a:off x="7875600" y="91440"/>
+            <a:ext cx="27432" cy="274320"/>
+          </a:xfrm>
+          <a:prstGeom prst="rect">
+            <a:avLst/>
+          </a:prstGeom>
+          <a:solidFill>
+            <a:srgbClr val="B45309"/>
+          </a:solidFill>
+          <a:ln w="12700">
+            <a:solidFill>
+              <a:srgbClr val="B45309"/>
+            </a:solidFill>
+            <a:prstDash val="solid"/>
+          </a:ln>
+        </p:spPr>
+      </p:sp>
+      <p:sp>
+        <p:nvSpPr>
+          <p:cNvPr id="6" name="Shape 3"/>
+          <p:cNvSpPr/>
+          <p:nvPr/>
+        </p:nvSpPr>
+        <p:spPr>
+          <a:xfrm>
+            <a:off x="7930464" y="91440"/>
+            <a:ext cx="27432" cy="274320"/>
+          </a:xfrm>
+          <a:prstGeom prst="rect">
+            <a:avLst/>
+          </a:prstGeom>
+          <a:solidFill>
+            <a:srgbClr val="B45309"/>
+          </a:solidFill>
+          <a:ln w="12700">
+            <a:solidFill>
+              <a:srgbClr val="B45309"/>
+            </a:solidFill>
+            <a:prstDash val="solid"/>
+          </a:ln>
+        </p:spPr>
+      </p:sp>
+      <p:pic>
+        <p:nvPicPr>
+          <p:cNvPr id="7" name="Image 0" descr="preencoded.png">    </p:cNvPr>
+          <p:cNvPicPr>
+            <a:picLocks noChangeAspect="1"/>
+          </p:cNvPicPr>
+          <p:nvPr/>
+        </p:nvPicPr>
+        <p:blipFill>
+          <a:blip r:embed="rId1"/>
+          <a:stretch>
+            <a:fillRect/>
+          </a:stretch>
+        </p:blipFill>
+        <p:spPr>
+          <a:xfrm>
+            <a:off x="8003616" y="128016"/>
+            <a:ext cx="201168" cy="201168"/>
+          </a:xfrm>
+          <a:prstGeom prst="rect">
+            <a:avLst/>
+          </a:prstGeom>
+        </p:spPr>
+      </p:pic>
+      <p:sp>
+        <p:nvSpPr>
+          <p:cNvPr id="8" name="Text 4"/>
+          <p:cNvSpPr txBox="1"/>
+          <p:nvPr/>
+        </p:nvSpPr>
+        <p:spPr>
+          <a:xfrm>
+            <a:off x="8259648" y="91440"/>
+            <a:ext cx="3346831" cy="274320"/>
+          </a:xfrm>
+          <a:prstGeom prst="rect">
+            <a:avLst/>
+          </a:prstGeom>
+          <a:noFill/>
+          <a:ln/>
+        </p:spPr>
+        <p:txBody>
+          <a:bodyPr wrap="square" lIns="0" tIns="0" rIns="0" bIns="0" rtlCol="0" anchor="ctr"/>
+          <a:lstStyle/>
+          <a:p>
+            <a:pPr indent="0" marL="0">
+              <a:buNone/>
+            </a:pPr>
+            <a:r>
+              <a:rPr lang="en-US" sz="1100" b="1" dirty="0">
+                <a:solidFill>
+                  <a:srgbClr val="92400E"/>
+                </a:solidFill>
+                <a:latin typeface="Calibri" pitchFamily="34" charset="0"/>
+                <a:ea typeface="Calibri" pitchFamily="34" charset="-122"/>
+                <a:cs typeface="Calibri" pitchFamily="34" charset="-120"/>
+              </a:rPr>
+              <a:t>DA UTILIZZARE OGGI</a:t>
+            </a:r>
+            <a:pPr indent="0" marL="0">
+              <a:buNone/>
+            </a:pPr>
+            <a:r>
+              <a:rPr lang="en-US" sz="1100" dirty="0">
+                <a:solidFill>
+                  <a:srgbClr val="92400E"/>
+                </a:solidFill>
+                <a:latin typeface="Calibri" pitchFamily="34" charset="0"/>
+                <a:ea typeface="Calibri" pitchFamily="34" charset="-122"/>
+                <a:cs typeface="Calibri" pitchFamily="34" charset="-120"/>
+              </a:rPr>
+              <a:t> · gli strumenti di PRG32</a:t>
+            </a:r>
+            <a:endParaRPr lang="en-US" sz="1100" dirty="0"/>
+          </a:p>
+        </p:txBody>
+      </p:sp>
+      <p:sp>
+        <p:nvSpPr>
           <p:cNvPr id="25" name="Slide Number Placeholder 0"/>
           <p:cNvSpPr>
             <a:spLocks noGrp="1"/>
@@ -17155,6 +19047,158 @@
       </p:sp>
       <p:sp>
         <p:nvSpPr>
+          <p:cNvPr id="5" name="Shape 3"/>
+          <p:cNvSpPr/>
+          <p:nvPr/>
+        </p:nvSpPr>
+        <p:spPr>
+          <a:xfrm>
+            <a:off x="7875600" y="91440"/>
+            <a:ext cx="3767455" cy="274320"/>
+          </a:xfrm>
+          <a:prstGeom prst="rect">
+            <a:avLst/>
+          </a:prstGeom>
+          <a:solidFill>
+            <a:srgbClr val="FEF3C7"/>
+          </a:solidFill>
+          <a:ln w="12700">
+            <a:solidFill>
+              <a:srgbClr val="B45309"/>
+            </a:solidFill>
+            <a:prstDash val="solid"/>
+          </a:ln>
+        </p:spPr>
+      </p:sp>
+      <p:sp>
+        <p:nvSpPr>
+          <p:cNvPr id="6" name="Shape 4"/>
+          <p:cNvSpPr/>
+          <p:nvPr/>
+        </p:nvSpPr>
+        <p:spPr>
+          <a:xfrm>
+            <a:off x="7875600" y="91440"/>
+            <a:ext cx="27432" cy="274320"/>
+          </a:xfrm>
+          <a:prstGeom prst="rect">
+            <a:avLst/>
+          </a:prstGeom>
+          <a:solidFill>
+            <a:srgbClr val="B45309"/>
+          </a:solidFill>
+          <a:ln w="12700">
+            <a:solidFill>
+              <a:srgbClr val="B45309"/>
+            </a:solidFill>
+            <a:prstDash val="solid"/>
+          </a:ln>
+        </p:spPr>
+      </p:sp>
+      <p:sp>
+        <p:nvSpPr>
+          <p:cNvPr id="7" name="Shape 5"/>
+          <p:cNvSpPr/>
+          <p:nvPr/>
+        </p:nvSpPr>
+        <p:spPr>
+          <a:xfrm>
+            <a:off x="7930464" y="91440"/>
+            <a:ext cx="27432" cy="274320"/>
+          </a:xfrm>
+          <a:prstGeom prst="rect">
+            <a:avLst/>
+          </a:prstGeom>
+          <a:solidFill>
+            <a:srgbClr val="B45309"/>
+          </a:solidFill>
+          <a:ln w="12700">
+            <a:solidFill>
+              <a:srgbClr val="B45309"/>
+            </a:solidFill>
+            <a:prstDash val="solid"/>
+          </a:ln>
+        </p:spPr>
+      </p:sp>
+      <p:pic>
+        <p:nvPicPr>
+          <p:cNvPr id="8" name="Image 0" descr="preencoded.png">    </p:cNvPr>
+          <p:cNvPicPr>
+            <a:picLocks noChangeAspect="1"/>
+          </p:cNvPicPr>
+          <p:nvPr/>
+        </p:nvPicPr>
+        <p:blipFill>
+          <a:blip r:embed="rId1"/>
+          <a:stretch>
+            <a:fillRect/>
+          </a:stretch>
+        </p:blipFill>
+        <p:spPr>
+          <a:xfrm>
+            <a:off x="8003616" y="128016"/>
+            <a:ext cx="201168" cy="201168"/>
+          </a:xfrm>
+          <a:prstGeom prst="rect">
+            <a:avLst/>
+          </a:prstGeom>
+        </p:spPr>
+      </p:pic>
+      <p:sp>
+        <p:nvSpPr>
+          <p:cNvPr id="9" name="Text 6"/>
+          <p:cNvSpPr txBox="1"/>
+          <p:nvPr/>
+        </p:nvSpPr>
+        <p:spPr>
+          <a:xfrm>
+            <a:off x="8259648" y="91440"/>
+            <a:ext cx="3346831" cy="274320"/>
+          </a:xfrm>
+          <a:prstGeom prst="rect">
+            <a:avLst/>
+          </a:prstGeom>
+          <a:noFill/>
+          <a:ln/>
+        </p:spPr>
+        <p:txBody>
+          <a:bodyPr wrap="square" lIns="0" tIns="0" rIns="0" bIns="0" rtlCol="0" anchor="ctr"/>
+          <a:lstStyle/>
+          <a:p>
+            <a:pPr indent="0" marL="0">
+              <a:buNone/>
+            </a:pPr>
+            <a:r>
+              <a:rPr lang="en-US" sz="1100" b="1" dirty="0">
+                <a:solidFill>
+                  <a:srgbClr val="92400E"/>
+                </a:solidFill>
+                <a:latin typeface="Calibri" pitchFamily="34" charset="0"/>
+                <a:ea typeface="Calibri" pitchFamily="34" charset="-122"/>
+                <a:cs typeface="Calibri" pitchFamily="34" charset="-120"/>
+              </a:rPr>
+              <a:t>DA UTILIZZARE OGGI</a:t>
+            </a:r>
+            <a:pPr indent="0" marL="0">
+              <a:buNone/>
+            </a:pPr>
+            <a:r>
+              <a:rPr lang="en-US" sz="1100" dirty="0">
+                <a:solidFill>
+                  <a:srgbClr val="92400E"/>
+                </a:solidFill>
+                <a:latin typeface="Calibri" pitchFamily="34" charset="0"/>
+                <a:ea typeface="Calibri" pitchFamily="34" charset="-122"/>
+                <a:cs typeface="Calibri" pitchFamily="34" charset="-120"/>
+              </a:rPr>
+              <a:t> · gli strumenti di PRG32</a:t>
+            </a:r>
+            <a:endParaRPr lang="en-US" sz="1100" dirty="0"/>
+          </a:p>
+        </p:txBody>
+      </p:sp>
+      <p:sp>
+        <p:nvSpPr>
           <p:cNvPr id="25" name="Slide Number Placeholder 0"/>
           <p:cNvSpPr>
             <a:spLocks noGrp="1"/>
@@ -18259,6 +20303,133 @@
       </p:sp>
       <p:sp>
         <p:nvSpPr>
+          <p:cNvPr id="17" name="Shape 15"/>
+          <p:cNvSpPr/>
+          <p:nvPr/>
+        </p:nvSpPr>
+        <p:spPr>
+          <a:xfrm>
+            <a:off x="8051622" y="91440"/>
+            <a:ext cx="3591433" cy="274320"/>
+          </a:xfrm>
+          <a:prstGeom prst="rect">
+            <a:avLst/>
+          </a:prstGeom>
+          <a:solidFill>
+            <a:srgbClr val="E0F2FE"/>
+          </a:solidFill>
+          <a:ln w="12700">
+            <a:solidFill>
+              <a:srgbClr val="0369A1"/>
+            </a:solidFill>
+            <a:prstDash val="solid"/>
+          </a:ln>
+        </p:spPr>
+      </p:sp>
+      <p:sp>
+        <p:nvSpPr>
+          <p:cNvPr id="18" name="Shape 16"/>
+          <p:cNvSpPr/>
+          <p:nvPr/>
+        </p:nvSpPr>
+        <p:spPr>
+          <a:xfrm>
+            <a:off x="8051622" y="91440"/>
+            <a:ext cx="73152" cy="274320"/>
+          </a:xfrm>
+          <a:prstGeom prst="rect">
+            <a:avLst/>
+          </a:prstGeom>
+          <a:solidFill>
+            <a:srgbClr val="0369A1"/>
+          </a:solidFill>
+          <a:ln w="12700">
+            <a:solidFill>
+              <a:srgbClr val="0369A1"/>
+            </a:solidFill>
+            <a:prstDash val="solid"/>
+          </a:ln>
+        </p:spPr>
+      </p:sp>
+      <p:pic>
+        <p:nvPicPr>
+          <p:cNvPr id="19" name="Image 0" descr="preencoded.png">    </p:cNvPr>
+          <p:cNvPicPr>
+            <a:picLocks noChangeAspect="1"/>
+          </p:cNvPicPr>
+          <p:nvPr/>
+        </p:nvPicPr>
+        <p:blipFill>
+          <a:blip r:embed="rId1"/>
+          <a:stretch>
+            <a:fillRect/>
+          </a:stretch>
+        </p:blipFill>
+        <p:spPr>
+          <a:xfrm>
+            <a:off x="8179638" y="128016"/>
+            <a:ext cx="201168" cy="201168"/>
+          </a:xfrm>
+          <a:prstGeom prst="rect">
+            <a:avLst/>
+          </a:prstGeom>
+        </p:spPr>
+      </p:pic>
+      <p:sp>
+        <p:nvSpPr>
+          <p:cNvPr id="20" name="Text 17"/>
+          <p:cNvSpPr txBox="1"/>
+          <p:nvPr/>
+        </p:nvSpPr>
+        <p:spPr>
+          <a:xfrm>
+            <a:off x="8435670" y="91440"/>
+            <a:ext cx="3170809" cy="274320"/>
+          </a:xfrm>
+          <a:prstGeom prst="rect">
+            <a:avLst/>
+          </a:prstGeom>
+          <a:noFill/>
+          <a:ln/>
+        </p:spPr>
+        <p:txBody>
+          <a:bodyPr wrap="square" lIns="0" tIns="0" rIns="0" bIns="0" rtlCol="0" anchor="ctr"/>
+          <a:lstStyle/>
+          <a:p>
+            <a:pPr indent="0" marL="0">
+              <a:buNone/>
+            </a:pPr>
+            <a:r>
+              <a:rPr lang="en-US" sz="1100" b="1" dirty="0">
+                <a:solidFill>
+                  <a:srgbClr val="075985"/>
+                </a:solidFill>
+                <a:latin typeface="Calibri" pitchFamily="34" charset="0"/>
+                <a:ea typeface="Calibri" pitchFamily="34" charset="-122"/>
+                <a:cs typeface="Calibri" pitchFamily="34" charset="-120"/>
+              </a:rPr>
+              <a:t>DA COMPRENDERE OGGI</a:t>
+            </a:r>
+            <a:pPr indent="0" marL="0">
+              <a:buNone/>
+            </a:pPr>
+            <a:r>
+              <a:rPr lang="en-US" sz="1100" dirty="0">
+                <a:solidFill>
+                  <a:srgbClr val="075985"/>
+                </a:solidFill>
+                <a:latin typeface="Calibri" pitchFamily="34" charset="0"/>
+                <a:ea typeface="Calibri" pitchFamily="34" charset="-122"/>
+                <a:cs typeface="Calibri" pitchFamily="34" charset="-120"/>
+              </a:rPr>
+              <a:t> · le maschere di bit</a:t>
+            </a:r>
+            <a:endParaRPr lang="en-US" sz="1100" dirty="0"/>
+          </a:p>
+        </p:txBody>
+      </p:sp>
+      <p:sp>
+        <p:nvSpPr>
           <p:cNvPr id="25" name="Slide Number Placeholder 0"/>
           <p:cNvSpPr>
             <a:spLocks noGrp="1"/>
@@ -19154,6 +21325,133 @@
       </p:sp>
       <p:sp>
         <p:nvSpPr>
+          <p:cNvPr id="17" name="Shape 15"/>
+          <p:cNvSpPr/>
+          <p:nvPr/>
+        </p:nvSpPr>
+        <p:spPr>
+          <a:xfrm>
+            <a:off x="7920304" y="91440"/>
+            <a:ext cx="3722751" cy="274320"/>
+          </a:xfrm>
+          <a:prstGeom prst="rect">
+            <a:avLst/>
+          </a:prstGeom>
+          <a:solidFill>
+            <a:srgbClr val="E0F2FE"/>
+          </a:solidFill>
+          <a:ln w="12700">
+            <a:solidFill>
+              <a:srgbClr val="0369A1"/>
+            </a:solidFill>
+            <a:prstDash val="solid"/>
+          </a:ln>
+        </p:spPr>
+      </p:sp>
+      <p:sp>
+        <p:nvSpPr>
+          <p:cNvPr id="18" name="Shape 16"/>
+          <p:cNvSpPr/>
+          <p:nvPr/>
+        </p:nvSpPr>
+        <p:spPr>
+          <a:xfrm>
+            <a:off x="7920304" y="91440"/>
+            <a:ext cx="73152" cy="274320"/>
+          </a:xfrm>
+          <a:prstGeom prst="rect">
+            <a:avLst/>
+          </a:prstGeom>
+          <a:solidFill>
+            <a:srgbClr val="0369A1"/>
+          </a:solidFill>
+          <a:ln w="12700">
+            <a:solidFill>
+              <a:srgbClr val="0369A1"/>
+            </a:solidFill>
+            <a:prstDash val="solid"/>
+          </a:ln>
+        </p:spPr>
+      </p:sp>
+      <p:pic>
+        <p:nvPicPr>
+          <p:cNvPr id="19" name="Image 0" descr="preencoded.png">    </p:cNvPr>
+          <p:cNvPicPr>
+            <a:picLocks noChangeAspect="1"/>
+          </p:cNvPicPr>
+          <p:nvPr/>
+        </p:nvPicPr>
+        <p:blipFill>
+          <a:blip r:embed="rId1"/>
+          <a:stretch>
+            <a:fillRect/>
+          </a:stretch>
+        </p:blipFill>
+        <p:spPr>
+          <a:xfrm>
+            <a:off x="8048320" y="128016"/>
+            <a:ext cx="201168" cy="201168"/>
+          </a:xfrm>
+          <a:prstGeom prst="rect">
+            <a:avLst/>
+          </a:prstGeom>
+        </p:spPr>
+      </p:pic>
+      <p:sp>
+        <p:nvSpPr>
+          <p:cNvPr id="20" name="Text 17"/>
+          <p:cNvSpPr txBox="1"/>
+          <p:nvPr/>
+        </p:nvSpPr>
+        <p:spPr>
+          <a:xfrm>
+            <a:off x="8304352" y="91440"/>
+            <a:ext cx="3302127" cy="274320"/>
+          </a:xfrm>
+          <a:prstGeom prst="rect">
+            <a:avLst/>
+          </a:prstGeom>
+          <a:noFill/>
+          <a:ln/>
+        </p:spPr>
+        <p:txBody>
+          <a:bodyPr wrap="square" lIns="0" tIns="0" rIns="0" bIns="0" rtlCol="0" anchor="ctr"/>
+          <a:lstStyle/>
+          <a:p>
+            <a:pPr indent="0" marL="0">
+              <a:buNone/>
+            </a:pPr>
+            <a:r>
+              <a:rPr lang="en-US" sz="1100" b="1" dirty="0">
+                <a:solidFill>
+                  <a:srgbClr val="075985"/>
+                </a:solidFill>
+                <a:latin typeface="Calibri" pitchFamily="34" charset="0"/>
+                <a:ea typeface="Calibri" pitchFamily="34" charset="-122"/>
+                <a:cs typeface="Calibri" pitchFamily="34" charset="-120"/>
+              </a:rPr>
+              <a:t>DA COMPRENDERE OGGI</a:t>
+            </a:r>
+            <a:pPr indent="0" marL="0">
+              <a:buNone/>
+            </a:pPr>
+            <a:r>
+              <a:rPr lang="en-US" sz="1100" dirty="0">
+                <a:solidFill>
+                  <a:srgbClr val="075985"/>
+                </a:solidFill>
+                <a:latin typeface="Calibri" pitchFamily="34" charset="0"/>
+                <a:ea typeface="Calibri" pitchFamily="34" charset="-122"/>
+                <a:cs typeface="Calibri" pitchFamily="34" charset="-120"/>
+              </a:rPr>
+              <a:t> · gli array in memoria</a:t>
+            </a:r>
+            <a:endParaRPr lang="en-US" sz="1100" dirty="0"/>
+          </a:p>
+        </p:txBody>
+      </p:sp>
+      <p:sp>
+        <p:nvSpPr>
           <p:cNvPr id="25" name="Slide Number Placeholder 0"/>
           <p:cNvSpPr>
             <a:spLocks noGrp="1"/>
@@ -20278,6 +22576,133 @@
       </p:sp>
       <p:sp>
         <p:nvSpPr>
+          <p:cNvPr id="17" name="Shape 15"/>
+          <p:cNvSpPr/>
+          <p:nvPr/>
+        </p:nvSpPr>
+        <p:spPr>
+          <a:xfrm>
+            <a:off x="8051622" y="91440"/>
+            <a:ext cx="3591433" cy="274320"/>
+          </a:xfrm>
+          <a:prstGeom prst="rect">
+            <a:avLst/>
+          </a:prstGeom>
+          <a:solidFill>
+            <a:srgbClr val="E0F2FE"/>
+          </a:solidFill>
+          <a:ln w="12700">
+            <a:solidFill>
+              <a:srgbClr val="0369A1"/>
+            </a:solidFill>
+            <a:prstDash val="solid"/>
+          </a:ln>
+        </p:spPr>
+      </p:sp>
+      <p:sp>
+        <p:nvSpPr>
+          <p:cNvPr id="18" name="Shape 16"/>
+          <p:cNvSpPr/>
+          <p:nvPr/>
+        </p:nvSpPr>
+        <p:spPr>
+          <a:xfrm>
+            <a:off x="8051622" y="91440"/>
+            <a:ext cx="73152" cy="274320"/>
+          </a:xfrm>
+          <a:prstGeom prst="rect">
+            <a:avLst/>
+          </a:prstGeom>
+          <a:solidFill>
+            <a:srgbClr val="0369A1"/>
+          </a:solidFill>
+          <a:ln w="12700">
+            <a:solidFill>
+              <a:srgbClr val="0369A1"/>
+            </a:solidFill>
+            <a:prstDash val="solid"/>
+          </a:ln>
+        </p:spPr>
+      </p:sp>
+      <p:pic>
+        <p:nvPicPr>
+          <p:cNvPr id="19" name="Image 0" descr="preencoded.png">    </p:cNvPr>
+          <p:cNvPicPr>
+            <a:picLocks noChangeAspect="1"/>
+          </p:cNvPicPr>
+          <p:nvPr/>
+        </p:nvPicPr>
+        <p:blipFill>
+          <a:blip r:embed="rId1"/>
+          <a:stretch>
+            <a:fillRect/>
+          </a:stretch>
+        </p:blipFill>
+        <p:spPr>
+          <a:xfrm>
+            <a:off x="8179638" y="128016"/>
+            <a:ext cx="201168" cy="201168"/>
+          </a:xfrm>
+          <a:prstGeom prst="rect">
+            <a:avLst/>
+          </a:prstGeom>
+        </p:spPr>
+      </p:pic>
+      <p:sp>
+        <p:nvSpPr>
+          <p:cNvPr id="20" name="Text 17"/>
+          <p:cNvSpPr txBox="1"/>
+          <p:nvPr/>
+        </p:nvSpPr>
+        <p:spPr>
+          <a:xfrm>
+            <a:off x="8435670" y="91440"/>
+            <a:ext cx="3170809" cy="274320"/>
+          </a:xfrm>
+          <a:prstGeom prst="rect">
+            <a:avLst/>
+          </a:prstGeom>
+          <a:noFill/>
+          <a:ln/>
+        </p:spPr>
+        <p:txBody>
+          <a:bodyPr wrap="square" lIns="0" tIns="0" rIns="0" bIns="0" rtlCol="0" anchor="ctr"/>
+          <a:lstStyle/>
+          <a:p>
+            <a:pPr indent="0" marL="0">
+              <a:buNone/>
+            </a:pPr>
+            <a:r>
+              <a:rPr lang="en-US" sz="1100" b="1" dirty="0">
+                <a:solidFill>
+                  <a:srgbClr val="075985"/>
+                </a:solidFill>
+                <a:latin typeface="Calibri" pitchFamily="34" charset="0"/>
+                <a:ea typeface="Calibri" pitchFamily="34" charset="-122"/>
+                <a:cs typeface="Calibri" pitchFamily="34" charset="-120"/>
+              </a:rPr>
+              <a:t>DA COMPRENDERE OGGI</a:t>
+            </a:r>
+            <a:pPr indent="0" marL="0">
+              <a:buNone/>
+            </a:pPr>
+            <a:r>
+              <a:rPr lang="en-US" sz="1100" dirty="0">
+                <a:solidFill>
+                  <a:srgbClr val="075985"/>
+                </a:solidFill>
+                <a:latin typeface="Calibri" pitchFamily="34" charset="0"/>
+                <a:ea typeface="Calibri" pitchFamily="34" charset="-122"/>
+                <a:cs typeface="Calibri" pitchFamily="34" charset="-120"/>
+              </a:rPr>
+              <a:t> · le maschere di bit</a:t>
+            </a:r>
+            <a:endParaRPr lang="en-US" sz="1100" dirty="0"/>
+          </a:p>
+        </p:txBody>
+      </p:sp>
+      <p:sp>
+        <p:nvSpPr>
           <p:cNvPr id="25" name="Slide Number Placeholder 0"/>
           <p:cNvSpPr>
             <a:spLocks noGrp="1"/>
@@ -21043,6 +23468,133 @@
       </p:sp>
       <p:sp>
         <p:nvSpPr>
+          <p:cNvPr id="14" name="Shape 12"/>
+          <p:cNvSpPr/>
+          <p:nvPr/>
+        </p:nvSpPr>
+        <p:spPr>
+          <a:xfrm>
+            <a:off x="8182940" y="91440"/>
+            <a:ext cx="3460115" cy="274320"/>
+          </a:xfrm>
+          <a:prstGeom prst="rect">
+            <a:avLst/>
+          </a:prstGeom>
+          <a:solidFill>
+            <a:srgbClr val="E0F2FE"/>
+          </a:solidFill>
+          <a:ln w="12700">
+            <a:solidFill>
+              <a:srgbClr val="0369A1"/>
+            </a:solidFill>
+            <a:prstDash val="solid"/>
+          </a:ln>
+        </p:spPr>
+      </p:sp>
+      <p:sp>
+        <p:nvSpPr>
+          <p:cNvPr id="15" name="Shape 13"/>
+          <p:cNvSpPr/>
+          <p:nvPr/>
+        </p:nvSpPr>
+        <p:spPr>
+          <a:xfrm>
+            <a:off x="8182940" y="91440"/>
+            <a:ext cx="73152" cy="274320"/>
+          </a:xfrm>
+          <a:prstGeom prst="rect">
+            <a:avLst/>
+          </a:prstGeom>
+          <a:solidFill>
+            <a:srgbClr val="0369A1"/>
+          </a:solidFill>
+          <a:ln w="12700">
+            <a:solidFill>
+              <a:srgbClr val="0369A1"/>
+            </a:solidFill>
+            <a:prstDash val="solid"/>
+          </a:ln>
+        </p:spPr>
+      </p:sp>
+      <p:pic>
+        <p:nvPicPr>
+          <p:cNvPr id="16" name="Image 0" descr="preencoded.png">    </p:cNvPr>
+          <p:cNvPicPr>
+            <a:picLocks noChangeAspect="1"/>
+          </p:cNvPicPr>
+          <p:nvPr/>
+        </p:nvPicPr>
+        <p:blipFill>
+          <a:blip r:embed="rId1"/>
+          <a:stretch>
+            <a:fillRect/>
+          </a:stretch>
+        </p:blipFill>
+        <p:spPr>
+          <a:xfrm>
+            <a:off x="8310956" y="128016"/>
+            <a:ext cx="201168" cy="201168"/>
+          </a:xfrm>
+          <a:prstGeom prst="rect">
+            <a:avLst/>
+          </a:prstGeom>
+        </p:spPr>
+      </p:pic>
+      <p:sp>
+        <p:nvSpPr>
+          <p:cNvPr id="17" name="Text 14"/>
+          <p:cNvSpPr txBox="1"/>
+          <p:nvPr/>
+        </p:nvSpPr>
+        <p:spPr>
+          <a:xfrm>
+            <a:off x="8566988" y="91440"/>
+            <a:ext cx="3039491" cy="274320"/>
+          </a:xfrm>
+          <a:prstGeom prst="rect">
+            <a:avLst/>
+          </a:prstGeom>
+          <a:noFill/>
+          <a:ln/>
+        </p:spPr>
+        <p:txBody>
+          <a:bodyPr wrap="square" lIns="0" tIns="0" rIns="0" bIns="0" rtlCol="0" anchor="ctr"/>
+          <a:lstStyle/>
+          <a:p>
+            <a:pPr indent="0" marL="0">
+              <a:buNone/>
+            </a:pPr>
+            <a:r>
+              <a:rPr lang="en-US" sz="1100" b="1" dirty="0">
+                <a:solidFill>
+                  <a:srgbClr val="075985"/>
+                </a:solidFill>
+                <a:latin typeface="Calibri" pitchFamily="34" charset="0"/>
+                <a:ea typeface="Calibri" pitchFamily="34" charset="-122"/>
+                <a:cs typeface="Calibri" pitchFamily="34" charset="-120"/>
+              </a:rPr>
+              <a:t>DA COMPRENDERE OGGI</a:t>
+            </a:r>
+            <a:pPr indent="0" marL="0">
+              <a:buNone/>
+            </a:pPr>
+            <a:r>
+              <a:rPr lang="en-US" sz="1100" dirty="0">
+                <a:solidFill>
+                  <a:srgbClr val="075985"/>
+                </a:solidFill>
+                <a:latin typeface="Calibri" pitchFamily="34" charset="0"/>
+                <a:ea typeface="Calibri" pitchFamily="34" charset="-122"/>
+                <a:cs typeface="Calibri" pitchFamily="34" charset="-120"/>
+              </a:rPr>
+              <a:t> · la virgola fissa</a:t>
+            </a:r>
+            <a:endParaRPr lang="en-US" sz="1100" dirty="0"/>
+          </a:p>
+        </p:txBody>
+      </p:sp>
+      <p:sp>
+        <p:nvSpPr>
           <p:cNvPr id="25" name="Slide Number Placeholder 0"/>
           <p:cNvSpPr>
             <a:spLocks noGrp="1"/>
@@ -21952,6 +24504,133 @@
       </p:sp>
       <p:sp>
         <p:nvSpPr>
+          <p:cNvPr id="17" name="Shape 15"/>
+          <p:cNvSpPr/>
+          <p:nvPr/>
+        </p:nvSpPr>
+        <p:spPr>
+          <a:xfrm>
+            <a:off x="8379917" y="91440"/>
+            <a:ext cx="3263138" cy="274320"/>
+          </a:xfrm>
+          <a:prstGeom prst="rect">
+            <a:avLst/>
+          </a:prstGeom>
+          <a:solidFill>
+            <a:srgbClr val="E0F2FE"/>
+          </a:solidFill>
+          <a:ln w="12700">
+            <a:solidFill>
+              <a:srgbClr val="0369A1"/>
+            </a:solidFill>
+            <a:prstDash val="solid"/>
+          </a:ln>
+        </p:spPr>
+      </p:sp>
+      <p:sp>
+        <p:nvSpPr>
+          <p:cNvPr id="18" name="Shape 16"/>
+          <p:cNvSpPr/>
+          <p:nvPr/>
+        </p:nvSpPr>
+        <p:spPr>
+          <a:xfrm>
+            <a:off x="8379917" y="91440"/>
+            <a:ext cx="73152" cy="274320"/>
+          </a:xfrm>
+          <a:prstGeom prst="rect">
+            <a:avLst/>
+          </a:prstGeom>
+          <a:solidFill>
+            <a:srgbClr val="0369A1"/>
+          </a:solidFill>
+          <a:ln w="12700">
+            <a:solidFill>
+              <a:srgbClr val="0369A1"/>
+            </a:solidFill>
+            <a:prstDash val="solid"/>
+          </a:ln>
+        </p:spPr>
+      </p:sp>
+      <p:pic>
+        <p:nvPicPr>
+          <p:cNvPr id="19" name="Image 0" descr="preencoded.png">    </p:cNvPr>
+          <p:cNvPicPr>
+            <a:picLocks noChangeAspect="1"/>
+          </p:cNvPicPr>
+          <p:nvPr/>
+        </p:nvPicPr>
+        <p:blipFill>
+          <a:blip r:embed="rId1"/>
+          <a:stretch>
+            <a:fillRect/>
+          </a:stretch>
+        </p:blipFill>
+        <p:spPr>
+          <a:xfrm>
+            <a:off x="8507933" y="128016"/>
+            <a:ext cx="201168" cy="201168"/>
+          </a:xfrm>
+          <a:prstGeom prst="rect">
+            <a:avLst/>
+          </a:prstGeom>
+        </p:spPr>
+      </p:pic>
+      <p:sp>
+        <p:nvSpPr>
+          <p:cNvPr id="20" name="Text 17"/>
+          <p:cNvSpPr txBox="1"/>
+          <p:nvPr/>
+        </p:nvSpPr>
+        <p:spPr>
+          <a:xfrm>
+            <a:off x="8763965" y="91440"/>
+            <a:ext cx="2842514" cy="274320"/>
+          </a:xfrm>
+          <a:prstGeom prst="rect">
+            <a:avLst/>
+          </a:prstGeom>
+          <a:noFill/>
+          <a:ln/>
+        </p:spPr>
+        <p:txBody>
+          <a:bodyPr wrap="square" lIns="0" tIns="0" rIns="0" bIns="0" rtlCol="0" anchor="ctr"/>
+          <a:lstStyle/>
+          <a:p>
+            <a:pPr indent="0" marL="0">
+              <a:buNone/>
+            </a:pPr>
+            <a:r>
+              <a:rPr lang="en-US" sz="1100" b="1" dirty="0">
+                <a:solidFill>
+                  <a:srgbClr val="075985"/>
+                </a:solidFill>
+                <a:latin typeface="Calibri" pitchFamily="34" charset="0"/>
+                <a:ea typeface="Calibri" pitchFamily="34" charset="-122"/>
+                <a:cs typeface="Calibri" pitchFamily="34" charset="-120"/>
+              </a:rPr>
+              <a:t>DA COMPRENDERE OGGI</a:t>
+            </a:r>
+            <a:pPr indent="0" marL="0">
+              <a:buNone/>
+            </a:pPr>
+            <a:r>
+              <a:rPr lang="en-US" sz="1100" dirty="0">
+                <a:solidFill>
+                  <a:srgbClr val="075985"/>
+                </a:solidFill>
+                <a:latin typeface="Calibri" pitchFamily="34" charset="0"/>
+                <a:ea typeface="Calibri" pitchFamily="34" charset="-122"/>
+                <a:cs typeface="Calibri" pitchFamily="34" charset="-120"/>
+              </a:rPr>
+              <a:t> · i multiplexer</a:t>
+            </a:r>
+            <a:endParaRPr lang="en-US" sz="1100" dirty="0"/>
+          </a:p>
+        </p:txBody>
+      </p:sp>
+      <p:sp>
+        <p:nvSpPr>
           <p:cNvPr id="25" name="Slide Number Placeholder 0"/>
           <p:cNvSpPr>
             <a:spLocks noGrp="1"/>
@@ -22924,6 +25603,133 @@
               <a:t>t4 e t6 conservano la nuova cella per la slide successiva</a:t>
             </a:r>
             <a:endParaRPr lang="en-US" sz="1200" dirty="0"/>
+          </a:p>
+        </p:txBody>
+      </p:sp>
+      <p:sp>
+        <p:nvSpPr>
+          <p:cNvPr id="17" name="Shape 15"/>
+          <p:cNvSpPr/>
+          <p:nvPr/>
+        </p:nvSpPr>
+        <p:spPr>
+          <a:xfrm>
+            <a:off x="7395032" y="91440"/>
+            <a:ext cx="4248023" cy="274320"/>
+          </a:xfrm>
+          <a:prstGeom prst="rect">
+            <a:avLst/>
+          </a:prstGeom>
+          <a:solidFill>
+            <a:srgbClr val="E0F2FE"/>
+          </a:solidFill>
+          <a:ln w="12700">
+            <a:solidFill>
+              <a:srgbClr val="0369A1"/>
+            </a:solidFill>
+            <a:prstDash val="solid"/>
+          </a:ln>
+        </p:spPr>
+      </p:sp>
+      <p:sp>
+        <p:nvSpPr>
+          <p:cNvPr id="18" name="Shape 16"/>
+          <p:cNvSpPr/>
+          <p:nvPr/>
+        </p:nvSpPr>
+        <p:spPr>
+          <a:xfrm>
+            <a:off x="7395032" y="91440"/>
+            <a:ext cx="73152" cy="274320"/>
+          </a:xfrm>
+          <a:prstGeom prst="rect">
+            <a:avLst/>
+          </a:prstGeom>
+          <a:solidFill>
+            <a:srgbClr val="0369A1"/>
+          </a:solidFill>
+          <a:ln w="12700">
+            <a:solidFill>
+              <a:srgbClr val="0369A1"/>
+            </a:solidFill>
+            <a:prstDash val="solid"/>
+          </a:ln>
+        </p:spPr>
+      </p:sp>
+      <p:pic>
+        <p:nvPicPr>
+          <p:cNvPr id="19" name="Image 0" descr="preencoded.png">    </p:cNvPr>
+          <p:cNvPicPr>
+            <a:picLocks noChangeAspect="1"/>
+          </p:cNvPicPr>
+          <p:nvPr/>
+        </p:nvPicPr>
+        <p:blipFill>
+          <a:blip r:embed="rId1"/>
+          <a:stretch>
+            <a:fillRect/>
+          </a:stretch>
+        </p:blipFill>
+        <p:spPr>
+          <a:xfrm>
+            <a:off x="7523048" y="128016"/>
+            <a:ext cx="201168" cy="201168"/>
+          </a:xfrm>
+          <a:prstGeom prst="rect">
+            <a:avLst/>
+          </a:prstGeom>
+        </p:spPr>
+      </p:pic>
+      <p:sp>
+        <p:nvSpPr>
+          <p:cNvPr id="20" name="Text 17"/>
+          <p:cNvSpPr txBox="1"/>
+          <p:nvPr/>
+        </p:nvSpPr>
+        <p:spPr>
+          <a:xfrm>
+            <a:off x="7779080" y="91440"/>
+            <a:ext cx="3827399" cy="274320"/>
+          </a:xfrm>
+          <a:prstGeom prst="rect">
+            <a:avLst/>
+          </a:prstGeom>
+          <a:noFill/>
+          <a:ln/>
+        </p:spPr>
+        <p:txBody>
+          <a:bodyPr wrap="square" lIns="0" tIns="0" rIns="0" bIns="0" rtlCol="0" anchor="ctr"/>
+          <a:lstStyle/>
+          <a:p>
+            <a:pPr indent="0" marL="0">
+              <a:buNone/>
+            </a:pPr>
+            <a:r>
+              <a:rPr lang="en-US" sz="1100" b="1" dirty="0">
+                <a:solidFill>
+                  <a:srgbClr val="075985"/>
+                </a:solidFill>
+                <a:latin typeface="Calibri" pitchFamily="34" charset="0"/>
+                <a:ea typeface="Calibri" pitchFamily="34" charset="-122"/>
+                <a:cs typeface="Calibri" pitchFamily="34" charset="-120"/>
+              </a:rPr>
+              <a:t>DA COMPRENDERE OGGI</a:t>
+            </a:r>
+            <a:pPr indent="0" marL="0">
+              <a:buNone/>
+            </a:pPr>
+            <a:r>
+              <a:rPr lang="en-US" sz="1100" dirty="0">
+                <a:solidFill>
+                  <a:srgbClr val="075985"/>
+                </a:solidFill>
+                <a:latin typeface="Calibri" pitchFamily="34" charset="0"/>
+                <a:ea typeface="Calibri" pitchFamily="34" charset="-122"/>
+                <a:cs typeface="Calibri" pitchFamily="34" charset="-120"/>
+              </a:rPr>
+              <a:t> · istruzioni con o senza segno</a:t>
+            </a:r>
+            <a:endParaRPr lang="en-US" sz="1100" dirty="0"/>
           </a:p>
         </p:txBody>
       </p:sp>

--- a/it/slides/12-Architettura_dei_Calcolatori-Verm1_Parte_2-Codice.pptx
+++ b/it/slides/12-Architettura_dei_Calcolatori-Verm1_Parte_2-Codice.pptx
@@ -131,24 +131,24 @@
   <p:extLst>
     <p:ext uri="{521415D9-36F7-43E2-AB2F-B90AF26B5E84}">
       <p14:sectionLst xmlns:p14="http://schemas.microsoft.com/office/powerpoint/2010/main">
-        <p14:section name="Apertura" id="{4c2209d7-1b81-9502-087c-1c4df962fda9}">
+        <p14:section name="Apertura" id="{ac07f4fd-5257-3419-b332-03de57f7ca45}">
           <p14:sldIdLst>
             <p14:sldId id="256"/>
             <p14:sldId id="257"/>
           </p14:sldIdLst>
         </p14:section>
-        <p14:section name="I listati" id="{91d9bad8-551c-4289-cb46-d1beac12b9d4}">
+        <p14:section name="I listati" id="{8a02e809-0b6e-d41c-ca80-f1b2d157f503}">
           <p14:sldIdLst>
             <p14:sldId id="258"/>
           </p14:sldIdLst>
         </p14:section>
-        <p14:section name="Passo 1: nomi per i bit" id="{a65f0b10-5fcf-5803-af83-cc5bf3a44539}">
+        <p14:section name="Passo 1: nomi per i bit" id="{8c36c5cb-89a2-9b9f-a8f4-4f8121e18a26}">
           <p14:sldIdLst>
             <p14:sldId id="259"/>
             <p14:sldId id="260"/>
           </p14:sldIdLst>
         </p14:section>
-        <p14:section name="Passo 2: la guida" id="{5fe01658-a7b2-cd22-1970-29d8dbda862c}">
+        <p14:section name="Passo 2: la guida" id="{f4b09fb7-26b1-12bd-be1f-b23e92b97834}">
           <p14:sldIdLst>
             <p14:sldId id="261"/>
             <p14:sldId id="262"/>
@@ -158,7 +158,7 @@
             <p14:sldId id="266"/>
           </p14:sldIdLst>
         </p14:section>
-        <p14:section name="Passo 3: il cibo, un punteggio, un suono" id="{8a8127a7-c311-306b-033e-997c9470b0b4}">
+        <p14:section name="Passo 3: il cibo, un punteggio, un suono" id="{ec306926-4157-ab6b-ac46-284fb0ff55ba}">
           <p14:sldIdLst>
             <p14:sldId id="267"/>
             <p14:sldId id="268"/>
@@ -170,7 +170,7 @@
             <p14:sldId id="274"/>
           </p14:sldIdLst>
         </p14:section>
-        <p14:section name="Eseguire e provare" id="{d350eef5-c4e2-80f0-0369-bad5d6fb79e8}">
+        <p14:section name="Eseguire e provare" id="{aa60847c-c921-9018-d581-19bf99365e92}">
           <p14:sldIdLst>
             <p14:sldId id="275"/>
             <p14:sldId id="276"/>
@@ -179,7 +179,7 @@
             <p14:sldId id="279"/>
           </p14:sldIdLst>
         </p14:section>
-        <p14:section name="Esercizi" id="{6c4189b2-ba38-ee9c-4288-020a33bfd408}">
+        <p14:section name="Esercizi" id="{8de40ece-885f-8ddc-ca16-36b551b35168}">
           <p14:sldIdLst>
             <p14:sldId id="280"/>
           </p14:sldIdLst>
